--- a/030_Project/032_Proposed Project/08_2026년 첨단소재 사업화 기술 개발(성과확장형)/ALD_기술난제_해결방안.pptx
+++ b/030_Project/032_Proposed Project/08_2026년 첨단소재 사업화 기술 개발(성과확장형)/ALD_기술난제_해결방안.pptx
@@ -5,16 +5,16 @@
     <p:sldMasterId id="2147483648" r:id="rId1"/>
   </p:sldMasterIdLst>
   <p:sldIdLst>
-    <p:sldId id="256" r:id="rId7"/>
-    <p:sldId id="257" r:id="rId8"/>
-    <p:sldId id="258" r:id="rId9"/>
-    <p:sldId id="259" r:id="rId10"/>
-    <p:sldId id="260" r:id="rId11"/>
-    <p:sldId id="261" r:id="rId12"/>
-    <p:sldId id="262" r:id="rId13"/>
-    <p:sldId id="263" r:id="rId14"/>
+    <p:sldId id="256" r:id="rId2"/>
+    <p:sldId id="257" r:id="rId3"/>
+    <p:sldId id="258" r:id="rId4"/>
+    <p:sldId id="259" r:id="rId5"/>
+    <p:sldId id="260" r:id="rId6"/>
+    <p:sldId id="261" r:id="rId7"/>
+    <p:sldId id="262" r:id="rId8"/>
+    <p:sldId id="263" r:id="rId9"/>
   </p:sldIdLst>
-  <p:sldSz cx="12188952" cy="6858000" type="screen4x3"/>
+  <p:sldSz cx="12188825" cy="6858000"/>
   <p:notesSz cx="6858000" cy="9144000"/>
   <p:defaultTextStyle>
     <a:defPPr>
@@ -111,6 +111,22 @@
       </a:defRPr>
     </a:lvl9pPr>
   </p:defaultTextStyle>
+  <p:extLst>
+    <p:ext uri="{EFAFB233-063F-42B5-8137-9DF3F51BA10A}">
+      <p15:sldGuideLst xmlns:p15="http://schemas.microsoft.com/office/powerpoint/2012/main">
+        <p15:guide id="1" orient="horz" pos="2160">
+          <p15:clr>
+            <a:srgbClr val="A4A3A4"/>
+          </p15:clr>
+        </p15:guide>
+        <p15:guide id="2" pos="2880">
+          <p15:clr>
+            <a:srgbClr val="A4A3A4"/>
+          </p15:clr>
+        </p15:guide>
+      </p15:sldGuideLst>
+    </p:ext>
+  </p:extLst>
 </p:presentation>
 </file>
 
@@ -152,10 +168,9 @@
           <a:lstStyle/>
           <a:p>
             <a:r>
-              <a:rPr lang="en-US" smtClean="0"/>
+              <a:rPr lang="en-US"/>
               <a:t>Click to edit Master title style</a:t>
             </a:r>
-            <a:endParaRPr lang="en-US"/>
           </a:p>
         </p:txBody>
       </p:sp>
@@ -271,10 +286,9 @@
           </a:lstStyle>
           <a:p>
             <a:r>
-              <a:rPr lang="en-US" smtClean="0"/>
+              <a:rPr lang="en-US"/>
               <a:t>Click to edit Master subtitle style</a:t>
             </a:r>
-            <a:endParaRPr lang="en-US"/>
           </a:p>
         </p:txBody>
       </p:sp>
@@ -295,7 +309,7 @@
           <a:p>
             <a:fld id="{5BCAD085-E8A6-8845-BD4E-CB4CCA059FC4}" type="datetimeFigureOut">
               <a:rPr lang="en-US" smtClean="0"/>
-              <a:t>1/27/13</a:t>
+              <a:t>6/11/2026</a:t>
             </a:fld>
             <a:endParaRPr lang="en-US"/>
           </a:p>
@@ -389,10 +403,9 @@
           <a:lstStyle/>
           <a:p>
             <a:r>
-              <a:rPr lang="en-US" smtClean="0"/>
+              <a:rPr lang="en-US"/>
               <a:t>Click to edit Master title style</a:t>
             </a:r>
-            <a:endParaRPr lang="en-US"/>
           </a:p>
         </p:txBody>
       </p:sp>
@@ -413,38 +426,37 @@
           <a:p>
             <a:pPr lvl="0"/>
             <a:r>
-              <a:rPr lang="en-US" smtClean="0"/>
+              <a:rPr lang="en-US"/>
               <a:t>Click to edit Master text styles</a:t>
             </a:r>
           </a:p>
           <a:p>
             <a:pPr lvl="1"/>
             <a:r>
-              <a:rPr lang="en-US" smtClean="0"/>
+              <a:rPr lang="en-US"/>
               <a:t>Second level</a:t>
             </a:r>
           </a:p>
           <a:p>
             <a:pPr lvl="2"/>
             <a:r>
-              <a:rPr lang="en-US" smtClean="0"/>
+              <a:rPr lang="en-US"/>
               <a:t>Third level</a:t>
             </a:r>
           </a:p>
           <a:p>
             <a:pPr lvl="3"/>
             <a:r>
-              <a:rPr lang="en-US" smtClean="0"/>
+              <a:rPr lang="en-US"/>
               <a:t>Fourth level</a:t>
             </a:r>
           </a:p>
           <a:p>
             <a:pPr lvl="4"/>
             <a:r>
-              <a:rPr lang="en-US" smtClean="0"/>
+              <a:rPr lang="en-US"/>
               <a:t>Fifth level</a:t>
             </a:r>
-            <a:endParaRPr lang="en-US"/>
           </a:p>
         </p:txBody>
       </p:sp>
@@ -465,7 +477,7 @@
           <a:p>
             <a:fld id="{5BCAD085-E8A6-8845-BD4E-CB4CCA059FC4}" type="datetimeFigureOut">
               <a:rPr lang="en-US" smtClean="0"/>
-              <a:t>1/27/13</a:t>
+              <a:t>6/11/2026</a:t>
             </a:fld>
             <a:endParaRPr lang="en-US"/>
           </a:p>
@@ -564,10 +576,9 @@
           <a:lstStyle/>
           <a:p>
             <a:r>
-              <a:rPr lang="en-US" smtClean="0"/>
+              <a:rPr lang="en-US"/>
               <a:t>Click to edit Master title style</a:t>
             </a:r>
-            <a:endParaRPr lang="en-US"/>
           </a:p>
         </p:txBody>
       </p:sp>
@@ -593,38 +604,37 @@
           <a:p>
             <a:pPr lvl="0"/>
             <a:r>
-              <a:rPr lang="en-US" smtClean="0"/>
+              <a:rPr lang="en-US"/>
               <a:t>Click to edit Master text styles</a:t>
             </a:r>
           </a:p>
           <a:p>
             <a:pPr lvl="1"/>
             <a:r>
-              <a:rPr lang="en-US" smtClean="0"/>
+              <a:rPr lang="en-US"/>
               <a:t>Second level</a:t>
             </a:r>
           </a:p>
           <a:p>
             <a:pPr lvl="2"/>
             <a:r>
-              <a:rPr lang="en-US" smtClean="0"/>
+              <a:rPr lang="en-US"/>
               <a:t>Third level</a:t>
             </a:r>
           </a:p>
           <a:p>
             <a:pPr lvl="3"/>
             <a:r>
-              <a:rPr lang="en-US" smtClean="0"/>
+              <a:rPr lang="en-US"/>
               <a:t>Fourth level</a:t>
             </a:r>
           </a:p>
           <a:p>
             <a:pPr lvl="4"/>
             <a:r>
-              <a:rPr lang="en-US" smtClean="0"/>
+              <a:rPr lang="en-US"/>
               <a:t>Fifth level</a:t>
             </a:r>
-            <a:endParaRPr lang="en-US"/>
           </a:p>
         </p:txBody>
       </p:sp>
@@ -645,7 +655,7 @@
           <a:p>
             <a:fld id="{5BCAD085-E8A6-8845-BD4E-CB4CCA059FC4}" type="datetimeFigureOut">
               <a:rPr lang="en-US" smtClean="0"/>
-              <a:t>1/27/13</a:t>
+              <a:t>6/11/2026</a:t>
             </a:fld>
             <a:endParaRPr lang="en-US"/>
           </a:p>
@@ -739,10 +749,9 @@
           <a:lstStyle/>
           <a:p>
             <a:r>
-              <a:rPr lang="en-US" smtClean="0"/>
+              <a:rPr lang="en-US"/>
               <a:t>Click to edit Master title style</a:t>
             </a:r>
-            <a:endParaRPr lang="en-US"/>
           </a:p>
         </p:txBody>
       </p:sp>
@@ -763,38 +772,37 @@
           <a:p>
             <a:pPr lvl="0"/>
             <a:r>
-              <a:rPr lang="en-US" smtClean="0"/>
+              <a:rPr lang="en-US"/>
               <a:t>Click to edit Master text styles</a:t>
             </a:r>
           </a:p>
           <a:p>
             <a:pPr lvl="1"/>
             <a:r>
-              <a:rPr lang="en-US" smtClean="0"/>
+              <a:rPr lang="en-US"/>
               <a:t>Second level</a:t>
             </a:r>
           </a:p>
           <a:p>
             <a:pPr lvl="2"/>
             <a:r>
-              <a:rPr lang="en-US" smtClean="0"/>
+              <a:rPr lang="en-US"/>
               <a:t>Third level</a:t>
             </a:r>
           </a:p>
           <a:p>
             <a:pPr lvl="3"/>
             <a:r>
-              <a:rPr lang="en-US" smtClean="0"/>
+              <a:rPr lang="en-US"/>
               <a:t>Fourth level</a:t>
             </a:r>
           </a:p>
           <a:p>
             <a:pPr lvl="4"/>
             <a:r>
-              <a:rPr lang="en-US" smtClean="0"/>
+              <a:rPr lang="en-US"/>
               <a:t>Fifth level</a:t>
             </a:r>
-            <a:endParaRPr lang="en-US"/>
           </a:p>
         </p:txBody>
       </p:sp>
@@ -815,7 +823,7 @@
           <a:p>
             <a:fld id="{5BCAD085-E8A6-8845-BD4E-CB4CCA059FC4}" type="datetimeFigureOut">
               <a:rPr lang="en-US" smtClean="0"/>
-              <a:t>1/27/13</a:t>
+              <a:t>6/11/2026</a:t>
             </a:fld>
             <a:endParaRPr lang="en-US"/>
           </a:p>
@@ -918,10 +926,9 @@
           </a:lstStyle>
           <a:p>
             <a:r>
-              <a:rPr lang="en-US" smtClean="0"/>
+              <a:rPr lang="en-US"/>
               <a:t>Click to edit Master title style</a:t>
             </a:r>
-            <a:endParaRPr lang="en-US"/>
           </a:p>
         </p:txBody>
       </p:sp>
@@ -1038,7 +1045,7 @@
           <a:p>
             <a:pPr lvl="0"/>
             <a:r>
-              <a:rPr lang="en-US" smtClean="0"/>
+              <a:rPr lang="en-US"/>
               <a:t>Click to edit Master text styles</a:t>
             </a:r>
           </a:p>
@@ -1061,7 +1068,7 @@
           <a:p>
             <a:fld id="{5BCAD085-E8A6-8845-BD4E-CB4CCA059FC4}" type="datetimeFigureOut">
               <a:rPr lang="en-US" smtClean="0"/>
-              <a:t>1/27/13</a:t>
+              <a:t>6/11/2026</a:t>
             </a:fld>
             <a:endParaRPr lang="en-US"/>
           </a:p>
@@ -1155,10 +1162,9 @@
           <a:lstStyle/>
           <a:p>
             <a:r>
-              <a:rPr lang="en-US" smtClean="0"/>
+              <a:rPr lang="en-US"/>
               <a:t>Click to edit Master title style</a:t>
             </a:r>
-            <a:endParaRPr lang="en-US"/>
           </a:p>
         </p:txBody>
       </p:sp>
@@ -1212,38 +1218,37 @@
           <a:p>
             <a:pPr lvl="0"/>
             <a:r>
-              <a:rPr lang="en-US" smtClean="0"/>
+              <a:rPr lang="en-US"/>
               <a:t>Click to edit Master text styles</a:t>
             </a:r>
           </a:p>
           <a:p>
             <a:pPr lvl="1"/>
             <a:r>
-              <a:rPr lang="en-US" smtClean="0"/>
+              <a:rPr lang="en-US"/>
               <a:t>Second level</a:t>
             </a:r>
           </a:p>
           <a:p>
             <a:pPr lvl="2"/>
             <a:r>
-              <a:rPr lang="en-US" smtClean="0"/>
+              <a:rPr lang="en-US"/>
               <a:t>Third level</a:t>
             </a:r>
           </a:p>
           <a:p>
             <a:pPr lvl="3"/>
             <a:r>
-              <a:rPr lang="en-US" smtClean="0"/>
+              <a:rPr lang="en-US"/>
               <a:t>Fourth level</a:t>
             </a:r>
           </a:p>
           <a:p>
             <a:pPr lvl="4"/>
             <a:r>
-              <a:rPr lang="en-US" smtClean="0"/>
+              <a:rPr lang="en-US"/>
               <a:t>Fifth level</a:t>
             </a:r>
-            <a:endParaRPr lang="en-US"/>
           </a:p>
         </p:txBody>
       </p:sp>
@@ -1297,38 +1302,37 @@
           <a:p>
             <a:pPr lvl="0"/>
             <a:r>
-              <a:rPr lang="en-US" smtClean="0"/>
+              <a:rPr lang="en-US"/>
               <a:t>Click to edit Master text styles</a:t>
             </a:r>
           </a:p>
           <a:p>
             <a:pPr lvl="1"/>
             <a:r>
-              <a:rPr lang="en-US" smtClean="0"/>
+              <a:rPr lang="en-US"/>
               <a:t>Second level</a:t>
             </a:r>
           </a:p>
           <a:p>
             <a:pPr lvl="2"/>
             <a:r>
-              <a:rPr lang="en-US" smtClean="0"/>
+              <a:rPr lang="en-US"/>
               <a:t>Third level</a:t>
             </a:r>
           </a:p>
           <a:p>
             <a:pPr lvl="3"/>
             <a:r>
-              <a:rPr lang="en-US" smtClean="0"/>
+              <a:rPr lang="en-US"/>
               <a:t>Fourth level</a:t>
             </a:r>
           </a:p>
           <a:p>
             <a:pPr lvl="4"/>
             <a:r>
-              <a:rPr lang="en-US" smtClean="0"/>
+              <a:rPr lang="en-US"/>
               <a:t>Fifth level</a:t>
             </a:r>
-            <a:endParaRPr lang="en-US"/>
           </a:p>
         </p:txBody>
       </p:sp>
@@ -1349,7 +1353,7 @@
           <a:p>
             <a:fld id="{5BCAD085-E8A6-8845-BD4E-CB4CCA059FC4}" type="datetimeFigureOut">
               <a:rPr lang="en-US" smtClean="0"/>
-              <a:t>1/27/13</a:t>
+              <a:t>6/11/2026</a:t>
             </a:fld>
             <a:endParaRPr lang="en-US"/>
           </a:p>
@@ -1447,10 +1451,9 @@
           </a:lstStyle>
           <a:p>
             <a:r>
-              <a:rPr lang="en-US" smtClean="0"/>
+              <a:rPr lang="en-US"/>
               <a:t>Click to edit Master title style</a:t>
             </a:r>
-            <a:endParaRPr lang="en-US"/>
           </a:p>
         </p:txBody>
       </p:sp>
@@ -1513,7 +1516,7 @@
           <a:p>
             <a:pPr lvl="0"/>
             <a:r>
-              <a:rPr lang="en-US" smtClean="0"/>
+              <a:rPr lang="en-US"/>
               <a:t>Click to edit Master text styles</a:t>
             </a:r>
           </a:p>
@@ -1569,38 +1572,37 @@
           <a:p>
             <a:pPr lvl="0"/>
             <a:r>
-              <a:rPr lang="en-US" smtClean="0"/>
+              <a:rPr lang="en-US"/>
               <a:t>Click to edit Master text styles</a:t>
             </a:r>
           </a:p>
           <a:p>
             <a:pPr lvl="1"/>
             <a:r>
-              <a:rPr lang="en-US" smtClean="0"/>
+              <a:rPr lang="en-US"/>
               <a:t>Second level</a:t>
             </a:r>
           </a:p>
           <a:p>
             <a:pPr lvl="2"/>
             <a:r>
-              <a:rPr lang="en-US" smtClean="0"/>
+              <a:rPr lang="en-US"/>
               <a:t>Third level</a:t>
             </a:r>
           </a:p>
           <a:p>
             <a:pPr lvl="3"/>
             <a:r>
-              <a:rPr lang="en-US" smtClean="0"/>
+              <a:rPr lang="en-US"/>
               <a:t>Fourth level</a:t>
             </a:r>
           </a:p>
           <a:p>
             <a:pPr lvl="4"/>
             <a:r>
-              <a:rPr lang="en-US" smtClean="0"/>
+              <a:rPr lang="en-US"/>
               <a:t>Fifth level</a:t>
             </a:r>
-            <a:endParaRPr lang="en-US"/>
           </a:p>
         </p:txBody>
       </p:sp>
@@ -1663,7 +1665,7 @@
           <a:p>
             <a:pPr lvl="0"/>
             <a:r>
-              <a:rPr lang="en-US" smtClean="0"/>
+              <a:rPr lang="en-US"/>
               <a:t>Click to edit Master text styles</a:t>
             </a:r>
           </a:p>
@@ -1719,38 +1721,37 @@
           <a:p>
             <a:pPr lvl="0"/>
             <a:r>
-              <a:rPr lang="en-US" smtClean="0"/>
+              <a:rPr lang="en-US"/>
               <a:t>Click to edit Master text styles</a:t>
             </a:r>
           </a:p>
           <a:p>
             <a:pPr lvl="1"/>
             <a:r>
-              <a:rPr lang="en-US" smtClean="0"/>
+              <a:rPr lang="en-US"/>
               <a:t>Second level</a:t>
             </a:r>
           </a:p>
           <a:p>
             <a:pPr lvl="2"/>
             <a:r>
-              <a:rPr lang="en-US" smtClean="0"/>
+              <a:rPr lang="en-US"/>
               <a:t>Third level</a:t>
             </a:r>
           </a:p>
           <a:p>
             <a:pPr lvl="3"/>
             <a:r>
-              <a:rPr lang="en-US" smtClean="0"/>
+              <a:rPr lang="en-US"/>
               <a:t>Fourth level</a:t>
             </a:r>
           </a:p>
           <a:p>
             <a:pPr lvl="4"/>
             <a:r>
-              <a:rPr lang="en-US" smtClean="0"/>
+              <a:rPr lang="en-US"/>
               <a:t>Fifth level</a:t>
             </a:r>
-            <a:endParaRPr lang="en-US"/>
           </a:p>
         </p:txBody>
       </p:sp>
@@ -1771,7 +1772,7 @@
           <a:p>
             <a:fld id="{5BCAD085-E8A6-8845-BD4E-CB4CCA059FC4}" type="datetimeFigureOut">
               <a:rPr lang="en-US" smtClean="0"/>
-              <a:t>1/27/13</a:t>
+              <a:t>6/11/2026</a:t>
             </a:fld>
             <a:endParaRPr lang="en-US"/>
           </a:p>
@@ -1865,10 +1866,9 @@
           <a:lstStyle/>
           <a:p>
             <a:r>
-              <a:rPr lang="en-US" smtClean="0"/>
+              <a:rPr lang="en-US"/>
               <a:t>Click to edit Master title style</a:t>
             </a:r>
-            <a:endParaRPr lang="en-US"/>
           </a:p>
         </p:txBody>
       </p:sp>
@@ -1889,7 +1889,7 @@
           <a:p>
             <a:fld id="{5BCAD085-E8A6-8845-BD4E-CB4CCA059FC4}" type="datetimeFigureOut">
               <a:rPr lang="en-US" smtClean="0"/>
-              <a:t>1/27/13</a:t>
+              <a:t>6/11/2026</a:t>
             </a:fld>
             <a:endParaRPr lang="en-US"/>
           </a:p>
@@ -1984,7 +1984,7 @@
           <a:p>
             <a:fld id="{5BCAD085-E8A6-8845-BD4E-CB4CCA059FC4}" type="datetimeFigureOut">
               <a:rPr lang="en-US" smtClean="0"/>
-              <a:t>1/27/13</a:t>
+              <a:t>6/11/2026</a:t>
             </a:fld>
             <a:endParaRPr lang="en-US"/>
           </a:p>
@@ -2087,10 +2087,9 @@
           </a:lstStyle>
           <a:p>
             <a:r>
-              <a:rPr lang="en-US" smtClean="0"/>
+              <a:rPr lang="en-US"/>
               <a:t>Click to edit Master title style</a:t>
             </a:r>
-            <a:endParaRPr lang="en-US"/>
           </a:p>
         </p:txBody>
       </p:sp>
@@ -2144,38 +2143,37 @@
           <a:p>
             <a:pPr lvl="0"/>
             <a:r>
-              <a:rPr lang="en-US" smtClean="0"/>
+              <a:rPr lang="en-US"/>
               <a:t>Click to edit Master text styles</a:t>
             </a:r>
           </a:p>
           <a:p>
             <a:pPr lvl="1"/>
             <a:r>
-              <a:rPr lang="en-US" smtClean="0"/>
+              <a:rPr lang="en-US"/>
               <a:t>Second level</a:t>
             </a:r>
           </a:p>
           <a:p>
             <a:pPr lvl="2"/>
             <a:r>
-              <a:rPr lang="en-US" smtClean="0"/>
+              <a:rPr lang="en-US"/>
               <a:t>Third level</a:t>
             </a:r>
           </a:p>
           <a:p>
             <a:pPr lvl="3"/>
             <a:r>
-              <a:rPr lang="en-US" smtClean="0"/>
+              <a:rPr lang="en-US"/>
               <a:t>Fourth level</a:t>
             </a:r>
           </a:p>
           <a:p>
             <a:pPr lvl="4"/>
             <a:r>
-              <a:rPr lang="en-US" smtClean="0"/>
+              <a:rPr lang="en-US"/>
               <a:t>Fifth level</a:t>
             </a:r>
-            <a:endParaRPr lang="en-US"/>
           </a:p>
         </p:txBody>
       </p:sp>
@@ -2238,7 +2236,7 @@
           <a:p>
             <a:pPr lvl="0"/>
             <a:r>
-              <a:rPr lang="en-US" smtClean="0"/>
+              <a:rPr lang="en-US"/>
               <a:t>Click to edit Master text styles</a:t>
             </a:r>
           </a:p>
@@ -2261,7 +2259,7 @@
           <a:p>
             <a:fld id="{5BCAD085-E8A6-8845-BD4E-CB4CCA059FC4}" type="datetimeFigureOut">
               <a:rPr lang="en-US" smtClean="0"/>
-              <a:t>1/27/13</a:t>
+              <a:t>6/11/2026</a:t>
             </a:fld>
             <a:endParaRPr lang="en-US"/>
           </a:p>
@@ -2364,10 +2362,9 @@
           </a:lstStyle>
           <a:p>
             <a:r>
-              <a:rPr lang="en-US" smtClean="0"/>
+              <a:rPr lang="en-US"/>
               <a:t>Click to edit Master title style</a:t>
             </a:r>
-            <a:endParaRPr lang="en-US"/>
           </a:p>
         </p:txBody>
       </p:sp>
@@ -2491,7 +2488,7 @@
           <a:p>
             <a:pPr lvl="0"/>
             <a:r>
-              <a:rPr lang="en-US" smtClean="0"/>
+              <a:rPr lang="en-US"/>
               <a:t>Click to edit Master text styles</a:t>
             </a:r>
           </a:p>
@@ -2514,7 +2511,7 @@
           <a:p>
             <a:fld id="{5BCAD085-E8A6-8845-BD4E-CB4CCA059FC4}" type="datetimeFigureOut">
               <a:rPr lang="en-US" smtClean="0"/>
-              <a:t>1/27/13</a:t>
+              <a:t>6/11/2026</a:t>
             </a:fld>
             <a:endParaRPr lang="en-US"/>
           </a:p>
@@ -2623,10 +2620,9 @@
           <a:lstStyle/>
           <a:p>
             <a:r>
-              <a:rPr lang="en-US" smtClean="0"/>
+              <a:rPr lang="en-US"/>
               <a:t>Click to edit Master title style</a:t>
             </a:r>
-            <a:endParaRPr lang="en-US"/>
           </a:p>
         </p:txBody>
       </p:sp>
@@ -2657,38 +2653,37 @@
           <a:p>
             <a:pPr lvl="0"/>
             <a:r>
-              <a:rPr lang="en-US" smtClean="0"/>
+              <a:rPr lang="en-US"/>
               <a:t>Click to edit Master text styles</a:t>
             </a:r>
           </a:p>
           <a:p>
             <a:pPr lvl="1"/>
             <a:r>
-              <a:rPr lang="en-US" smtClean="0"/>
+              <a:rPr lang="en-US"/>
               <a:t>Second level</a:t>
             </a:r>
           </a:p>
           <a:p>
             <a:pPr lvl="2"/>
             <a:r>
-              <a:rPr lang="en-US" smtClean="0"/>
+              <a:rPr lang="en-US"/>
               <a:t>Third level</a:t>
             </a:r>
           </a:p>
           <a:p>
             <a:pPr lvl="3"/>
             <a:r>
-              <a:rPr lang="en-US" smtClean="0"/>
+              <a:rPr lang="en-US"/>
               <a:t>Fourth level</a:t>
             </a:r>
           </a:p>
           <a:p>
             <a:pPr lvl="4"/>
             <a:r>
-              <a:rPr lang="en-US" smtClean="0"/>
+              <a:rPr lang="en-US"/>
               <a:t>Fifth level</a:t>
             </a:r>
-            <a:endParaRPr lang="en-US"/>
           </a:p>
         </p:txBody>
       </p:sp>
@@ -2727,7 +2722,7 @@
           <a:p>
             <a:fld id="{5BCAD085-E8A6-8845-BD4E-CB4CCA059FC4}" type="datetimeFigureOut">
               <a:rPr lang="en-US" smtClean="0"/>
-              <a:t>1/27/13</a:t>
+              <a:t>6/11/2026</a:t>
             </a:fld>
             <a:endParaRPr lang="en-US"/>
           </a:p>
@@ -3086,7 +3081,7 @@
 </file>
 
 <file path=ppt/slides/slide1.xml><?xml version="1.0" encoding="utf-8"?>
-<p:sld xmlns:a="http://schemas.openxmlformats.org/drawingml/2006/main" xmlns:p="http://schemas.openxmlformats.org/presentationml/2006/main" xmlns:r="http://schemas.openxmlformats.org/officeDocument/2006/relationships">
+<p:sld xmlns:a="http://schemas.openxmlformats.org/drawingml/2006/main" xmlns:r="http://schemas.openxmlformats.org/officeDocument/2006/relationships" xmlns:p="http://schemas.openxmlformats.org/presentationml/2006/main">
   <p:cSld>
     <p:spTree>
       <p:nvGrpSpPr>
@@ -3094,7 +3089,14 @@
         <p:cNvGrpSpPr/>
         <p:nvPr/>
       </p:nvGrpSpPr>
-      <p:grpSpPr/>
+      <p:grpSpPr>
+        <a:xfrm>
+          <a:off x="0" y="0"/>
+          <a:ext cx="0" cy="0"/>
+          <a:chOff x="0" y="0"/>
+          <a:chExt cx="0" cy="0"/>
+        </a:xfrm>
+      </p:grpSpPr>
       <p:sp>
         <p:nvSpPr>
           <p:cNvPr id="2" name="Rectangle 1"/>
@@ -3135,6 +3137,7 @@
           <a:lstStyle/>
           <a:p>
             <a:pPr algn="ctr"/>
+            <a:endParaRPr/>
           </a:p>
         </p:txBody>
       </p:sp>
@@ -3178,6 +3181,7 @@
           <a:lstStyle/>
           <a:p>
             <a:pPr algn="ctr"/>
+            <a:endParaRPr/>
           </a:p>
         </p:txBody>
       </p:sp>
@@ -3221,6 +3225,7 @@
           <a:lstStyle/>
           <a:p>
             <a:pPr algn="ctr"/>
+            <a:endParaRPr/>
           </a:p>
         </p:txBody>
       </p:sp>
@@ -3241,7 +3246,7 @@
           <a:noFill/>
         </p:spPr>
         <p:txBody>
-          <a:bodyPr wrap="square" lIns="50800" rIns="50800" tIns="25400" bIns="25400">
+          <a:bodyPr wrap="square" lIns="50800" tIns="25400" rIns="50800" bIns="25400">
             <a:spAutoFit/>
           </a:bodyPr>
           <a:lstStyle/>
@@ -3286,7 +3291,7 @@
           <a:noFill/>
         </p:spPr>
         <p:txBody>
-          <a:bodyPr wrap="square" lIns="50800" rIns="50800" tIns="25400" bIns="25400">
+          <a:bodyPr wrap="square" lIns="50800" tIns="25400" rIns="50800" bIns="25400">
             <a:spAutoFit/>
           </a:bodyPr>
           <a:lstStyle/>
@@ -3320,7 +3325,7 @@
           <a:noFill/>
         </p:spPr>
         <p:txBody>
-          <a:bodyPr wrap="square" lIns="50800" rIns="50800" tIns="25400" bIns="25400">
+          <a:bodyPr wrap="square" lIns="50800" tIns="25400" rIns="50800" bIns="25400">
             <a:spAutoFit/>
           </a:bodyPr>
           <a:lstStyle/>
@@ -3399,6 +3404,7 @@
           <a:lstStyle/>
           <a:p>
             <a:pPr algn="ctr"/>
+            <a:endParaRPr/>
           </a:p>
         </p:txBody>
       </p:sp>
@@ -3419,7 +3425,7 @@
           <a:noFill/>
         </p:spPr>
         <p:txBody>
-          <a:bodyPr wrap="square" lIns="50800" rIns="50800" tIns="25400" bIns="25400">
+          <a:bodyPr wrap="square" lIns="50800" tIns="25400" rIns="50800" bIns="25400">
             <a:spAutoFit/>
           </a:bodyPr>
           <a:lstStyle/>
@@ -3445,7 +3451,7 @@
 </file>
 
 <file path=ppt/slides/slide2.xml><?xml version="1.0" encoding="utf-8"?>
-<p:sld xmlns:a="http://schemas.openxmlformats.org/drawingml/2006/main" xmlns:p="http://schemas.openxmlformats.org/presentationml/2006/main" xmlns:r="http://schemas.openxmlformats.org/officeDocument/2006/relationships">
+<p:sld xmlns:a="http://schemas.openxmlformats.org/drawingml/2006/main" xmlns:r="http://schemas.openxmlformats.org/officeDocument/2006/relationships" xmlns:p="http://schemas.openxmlformats.org/presentationml/2006/main">
   <p:cSld>
     <p:spTree>
       <p:nvGrpSpPr>
@@ -3453,7 +3459,14 @@
         <p:cNvGrpSpPr/>
         <p:nvPr/>
       </p:nvGrpSpPr>
-      <p:grpSpPr/>
+      <p:grpSpPr>
+        <a:xfrm>
+          <a:off x="0" y="0"/>
+          <a:ext cx="0" cy="0"/>
+          <a:chOff x="0" y="0"/>
+          <a:chExt cx="0" cy="0"/>
+        </a:xfrm>
+      </p:grpSpPr>
       <p:sp>
         <p:nvSpPr>
           <p:cNvPr id="2" name="Rectangle 1"/>
@@ -3494,6 +3507,7 @@
           <a:lstStyle/>
           <a:p>
             <a:pPr algn="ctr"/>
+            <a:endParaRPr/>
           </a:p>
         </p:txBody>
       </p:sp>
@@ -3537,6 +3551,7 @@
           <a:lstStyle/>
           <a:p>
             <a:pPr algn="ctr"/>
+            <a:endParaRPr/>
           </a:p>
         </p:txBody>
       </p:sp>
@@ -3580,6 +3595,7 @@
           <a:lstStyle/>
           <a:p>
             <a:pPr algn="ctr"/>
+            <a:endParaRPr/>
           </a:p>
         </p:txBody>
       </p:sp>
@@ -3600,7 +3616,7 @@
           <a:noFill/>
         </p:spPr>
         <p:txBody>
-          <a:bodyPr wrap="square" lIns="50800" rIns="50800" tIns="25400" bIns="25400">
+          <a:bodyPr wrap="square" lIns="50800" tIns="25400" rIns="50800" bIns="25400">
             <a:spAutoFit/>
           </a:bodyPr>
           <a:lstStyle/>
@@ -3634,7 +3650,7 @@
           <a:noFill/>
         </p:spPr>
         <p:txBody>
-          <a:bodyPr wrap="square" lIns="50800" rIns="50800" tIns="25400" bIns="25400">
+          <a:bodyPr wrap="square" lIns="50800" tIns="25400" rIns="50800" bIns="25400">
             <a:spAutoFit/>
           </a:bodyPr>
           <a:lstStyle/>
@@ -3693,6 +3709,7 @@
           <a:lstStyle/>
           <a:p>
             <a:pPr algn="ctr"/>
+            <a:endParaRPr/>
           </a:p>
         </p:txBody>
       </p:sp>
@@ -3713,7 +3730,7 @@
           <a:noFill/>
         </p:spPr>
         <p:txBody>
-          <a:bodyPr wrap="square" lIns="50800" rIns="50800" tIns="25400" bIns="25400">
+          <a:bodyPr wrap="square" lIns="50800" tIns="25400" rIns="50800" bIns="25400">
             <a:spAutoFit/>
           </a:bodyPr>
           <a:lstStyle/>
@@ -3781,6 +3798,7 @@
           <a:lstStyle/>
           <a:p>
             <a:pPr algn="ctr"/>
+            <a:endParaRPr/>
           </a:p>
         </p:txBody>
       </p:sp>
@@ -3801,7 +3819,7 @@
           <a:noFill/>
         </p:spPr>
         <p:txBody>
-          <a:bodyPr wrap="square" lIns="50800" rIns="50800" tIns="25400" bIns="25400">
+          <a:bodyPr wrap="square" lIns="50800" tIns="25400" rIns="50800" bIns="25400">
             <a:spAutoFit/>
           </a:bodyPr>
           <a:lstStyle/>
@@ -3835,7 +3853,7 @@
           <a:noFill/>
         </p:spPr>
         <p:txBody>
-          <a:bodyPr wrap="square" lIns="50800" rIns="50800" tIns="25400" bIns="25400">
+          <a:bodyPr wrap="square" lIns="50800" tIns="25400" rIns="50800" bIns="25400">
             <a:spAutoFit/>
           </a:bodyPr>
           <a:lstStyle/>
@@ -3905,6 +3923,7 @@
           <a:lstStyle/>
           <a:p>
             <a:pPr algn="ctr"/>
+            <a:endParaRPr/>
           </a:p>
         </p:txBody>
       </p:sp>
@@ -3925,7 +3944,7 @@
           <a:noFill/>
         </p:spPr>
         <p:txBody>
-          <a:bodyPr wrap="square" lIns="50800" rIns="50800" tIns="25400" bIns="25400">
+          <a:bodyPr wrap="square" lIns="50800" tIns="25400" rIns="50800" bIns="25400">
             <a:spAutoFit/>
           </a:bodyPr>
           <a:lstStyle/>
@@ -4015,6 +4034,7 @@
           <a:lstStyle/>
           <a:p>
             <a:pPr algn="ctr"/>
+            <a:endParaRPr/>
           </a:p>
         </p:txBody>
       </p:sp>
@@ -4035,7 +4055,7 @@
           <a:noFill/>
         </p:spPr>
         <p:txBody>
-          <a:bodyPr wrap="square" lIns="50800" rIns="50800" tIns="25400" bIns="25400">
+          <a:bodyPr wrap="square" lIns="50800" tIns="25400" rIns="50800" bIns="25400">
             <a:spAutoFit/>
           </a:bodyPr>
           <a:lstStyle/>
@@ -4069,7 +4089,7 @@
           <a:noFill/>
         </p:spPr>
         <p:txBody>
-          <a:bodyPr wrap="square" lIns="50800" rIns="50800" tIns="25400" bIns="25400">
+          <a:bodyPr wrap="square" lIns="50800" tIns="25400" rIns="50800" bIns="25400">
             <a:spAutoFit/>
           </a:bodyPr>
           <a:lstStyle/>
@@ -4139,6 +4159,7 @@
           <a:lstStyle/>
           <a:p>
             <a:pPr algn="ctr"/>
+            <a:endParaRPr/>
           </a:p>
         </p:txBody>
       </p:sp>
@@ -4159,7 +4180,7 @@
           <a:noFill/>
         </p:spPr>
         <p:txBody>
-          <a:bodyPr wrap="square" lIns="50800" rIns="50800" tIns="25400" bIns="25400">
+          <a:bodyPr wrap="square" lIns="50800" tIns="25400" rIns="50800" bIns="25400">
             <a:spAutoFit/>
           </a:bodyPr>
           <a:lstStyle/>
@@ -4249,6 +4270,7 @@
           <a:lstStyle/>
           <a:p>
             <a:pPr algn="ctr"/>
+            <a:endParaRPr/>
           </a:p>
         </p:txBody>
       </p:sp>
@@ -4269,7 +4291,7 @@
           <a:noFill/>
         </p:spPr>
         <p:txBody>
-          <a:bodyPr wrap="square" lIns="50800" rIns="50800" tIns="25400" bIns="25400">
+          <a:bodyPr wrap="square" lIns="50800" tIns="25400" rIns="50800" bIns="25400">
             <a:spAutoFit/>
           </a:bodyPr>
           <a:lstStyle/>
@@ -4303,7 +4325,7 @@
           <a:noFill/>
         </p:spPr>
         <p:txBody>
-          <a:bodyPr wrap="square" lIns="50800" rIns="50800" tIns="25400" bIns="25400">
+          <a:bodyPr wrap="square" lIns="50800" tIns="25400" rIns="50800" bIns="25400">
             <a:spAutoFit/>
           </a:bodyPr>
           <a:lstStyle/>
@@ -4373,6 +4395,7 @@
           <a:lstStyle/>
           <a:p>
             <a:pPr algn="ctr"/>
+            <a:endParaRPr/>
           </a:p>
         </p:txBody>
       </p:sp>
@@ -4393,7 +4416,7 @@
           <a:noFill/>
         </p:spPr>
         <p:txBody>
-          <a:bodyPr wrap="square" lIns="50800" rIns="50800" tIns="25400" bIns="25400">
+          <a:bodyPr wrap="square" lIns="50800" tIns="25400" rIns="50800" bIns="25400">
             <a:spAutoFit/>
           </a:bodyPr>
           <a:lstStyle/>
@@ -4485,6 +4508,7 @@
           <a:lstStyle/>
           <a:p>
             <a:pPr algn="ctr"/>
+            <a:endParaRPr/>
           </a:p>
         </p:txBody>
       </p:sp>
@@ -4505,7 +4529,7 @@
           <a:noFill/>
         </p:spPr>
         <p:txBody>
-          <a:bodyPr wrap="square" lIns="50800" rIns="50800" tIns="25400" bIns="25400">
+          <a:bodyPr wrap="square" lIns="50800" tIns="25400" rIns="50800" bIns="25400">
             <a:spAutoFit/>
           </a:bodyPr>
           <a:lstStyle/>
@@ -4531,7 +4555,7 @@
 </file>
 
 <file path=ppt/slides/slide3.xml><?xml version="1.0" encoding="utf-8"?>
-<p:sld xmlns:a="http://schemas.openxmlformats.org/drawingml/2006/main" xmlns:p="http://schemas.openxmlformats.org/presentationml/2006/main" xmlns:r="http://schemas.openxmlformats.org/officeDocument/2006/relationships">
+<p:sld xmlns:a="http://schemas.openxmlformats.org/drawingml/2006/main" xmlns:r="http://schemas.openxmlformats.org/officeDocument/2006/relationships" xmlns:p="http://schemas.openxmlformats.org/presentationml/2006/main">
   <p:cSld>
     <p:spTree>
       <p:nvGrpSpPr>
@@ -4539,7 +4563,14 @@
         <p:cNvGrpSpPr/>
         <p:nvPr/>
       </p:nvGrpSpPr>
-      <p:grpSpPr/>
+      <p:grpSpPr>
+        <a:xfrm>
+          <a:off x="0" y="0"/>
+          <a:ext cx="0" cy="0"/>
+          <a:chOff x="0" y="0"/>
+          <a:chExt cx="0" cy="0"/>
+        </a:xfrm>
+      </p:grpSpPr>
       <p:sp>
         <p:nvSpPr>
           <p:cNvPr id="2" name="Rectangle 1"/>
@@ -4580,6 +4611,7 @@
           <a:lstStyle/>
           <a:p>
             <a:pPr algn="ctr"/>
+            <a:endParaRPr/>
           </a:p>
         </p:txBody>
       </p:sp>
@@ -4623,6 +4655,7 @@
           <a:lstStyle/>
           <a:p>
             <a:pPr algn="ctr"/>
+            <a:endParaRPr/>
           </a:p>
         </p:txBody>
       </p:sp>
@@ -4666,6 +4699,7 @@
           <a:lstStyle/>
           <a:p>
             <a:pPr algn="ctr"/>
+            <a:endParaRPr/>
           </a:p>
         </p:txBody>
       </p:sp>
@@ -4686,7 +4720,7 @@
           <a:noFill/>
         </p:spPr>
         <p:txBody>
-          <a:bodyPr wrap="square" lIns="50800" rIns="50800" tIns="25400" bIns="25400">
+          <a:bodyPr wrap="square" lIns="50800" tIns="25400" rIns="50800" bIns="25400">
             <a:spAutoFit/>
           </a:bodyPr>
           <a:lstStyle/>
@@ -4720,7 +4754,7 @@
           <a:noFill/>
         </p:spPr>
         <p:txBody>
-          <a:bodyPr wrap="square" lIns="50800" rIns="50800" tIns="25400" bIns="25400">
+          <a:bodyPr wrap="square" lIns="50800" tIns="25400" rIns="50800" bIns="25400">
             <a:spAutoFit/>
           </a:bodyPr>
           <a:lstStyle/>
@@ -4737,1852 +4771,1955 @@
           </a:p>
         </p:txBody>
       </p:sp>
-      <p:sp>
-        <p:nvSpPr>
-          <p:cNvPr id="7" name="Rectangle 6"/>
-          <p:cNvSpPr/>
-          <p:nvPr/>
-        </p:nvSpPr>
-        <p:spPr>
-          <a:xfrm>
-            <a:off x="180000" y="684000"/>
-            <a:ext cx="3846984" cy="234000"/>
-          </a:xfrm>
-          <a:prstGeom prst="rect">
-            <a:avLst/>
-          </a:prstGeom>
-          <a:solidFill>
-            <a:srgbClr val="C00000"/>
-          </a:solidFill>
-          <a:ln>
-            <a:noFill/>
-          </a:ln>
-        </p:spPr>
-        <p:style>
-          <a:lnRef idx="1">
-            <a:schemeClr val="accent1"/>
-          </a:lnRef>
-          <a:fillRef idx="3">
-            <a:schemeClr val="accent1"/>
-          </a:fillRef>
-          <a:effectRef idx="2">
-            <a:schemeClr val="accent1"/>
-          </a:effectRef>
-          <a:fontRef idx="minor">
-            <a:schemeClr val="lt1"/>
-          </a:fontRef>
-        </p:style>
-        <p:txBody>
-          <a:bodyPr rtlCol="0" anchor="ctr"/>
-          <a:lstStyle/>
-          <a:p>
-            <a:pPr algn="ctr"/>
-          </a:p>
-        </p:txBody>
-      </p:sp>
-      <p:sp>
-        <p:nvSpPr>
-          <p:cNvPr id="8" name="TextBox 7"/>
-          <p:cNvSpPr txBox="1"/>
-          <p:nvPr/>
-        </p:nvSpPr>
-        <p:spPr>
-          <a:xfrm>
-            <a:off x="198000" y="694800"/>
-            <a:ext cx="3810984" cy="223200"/>
-          </a:xfrm>
-          <a:prstGeom prst="rect">
-            <a:avLst/>
-          </a:prstGeom>
-          <a:noFill/>
-        </p:spPr>
-        <p:txBody>
-          <a:bodyPr wrap="square" lIns="50800" rIns="50800" tIns="25400" bIns="25400">
-            <a:spAutoFit/>
-          </a:bodyPr>
-          <a:lstStyle/>
-          <a:p>
-            <a:pPr algn="ctr"/>
-            <a:r>
-              <a:rPr sz="1000" b="1" i="0">
-                <a:solidFill>
-                  <a:srgbClr val="FFFFFF"/>
-                </a:solidFill>
-              </a:rPr>
-              <a:t>난제 ①</a:t>
-            </a:r>
-          </a:p>
-          <a:p>
-            <a:pPr algn="ctr"/>
-            <a:r>
-              <a:rPr sz="1000" b="1" i="0">
-                <a:solidFill>
-                  <a:srgbClr val="FFFFFF"/>
-                </a:solidFill>
-              </a:rPr>
-              <a:t>배치 → 연속 이전 불가</a:t>
-            </a:r>
-          </a:p>
-        </p:txBody>
-      </p:sp>
-      <p:sp>
-        <p:nvSpPr>
-          <p:cNvPr id="9" name="Rectangle 8"/>
-          <p:cNvSpPr/>
-          <p:nvPr/>
-        </p:nvSpPr>
-        <p:spPr>
-          <a:xfrm>
-            <a:off x="180000" y="928800"/>
-            <a:ext cx="3846984" cy="1044000"/>
-          </a:xfrm>
-          <a:prstGeom prst="rect">
-            <a:avLst/>
-          </a:prstGeom>
-          <a:solidFill>
-            <a:srgbClr val="FFCCCC"/>
-          </a:solidFill>
-          <a:ln w="6350">
+      <p:grpSp>
+        <p:nvGrpSpPr>
+          <p:cNvPr id="46" name="그룹 45">
+            <a:extLst>
+              <a:ext uri="{FF2B5EF4-FFF2-40B4-BE49-F238E27FC236}">
+                <a16:creationId xmlns:a16="http://schemas.microsoft.com/office/drawing/2014/main" id="{62EEEAA8-2072-4D45-995F-D885FC573957}"/>
+              </a:ext>
+            </a:extLst>
+          </p:cNvPr>
+          <p:cNvGrpSpPr/>
+          <p:nvPr/>
+        </p:nvGrpSpPr>
+        <p:grpSpPr>
+          <a:xfrm>
+            <a:off x="180000" y="683999"/>
+            <a:ext cx="11684952" cy="5572867"/>
+            <a:chOff x="180000" y="684000"/>
+            <a:chExt cx="11684952" cy="3294000"/>
+          </a:xfrm>
+        </p:grpSpPr>
+        <p:sp>
+          <p:nvSpPr>
+            <p:cNvPr id="7" name="Rectangle 6"/>
+            <p:cNvSpPr/>
+            <p:nvPr/>
+          </p:nvSpPr>
+          <p:spPr>
+            <a:xfrm>
+              <a:off x="180000" y="684000"/>
+              <a:ext cx="3846984" cy="234000"/>
+            </a:xfrm>
+            <a:prstGeom prst="rect">
+              <a:avLst/>
+            </a:prstGeom>
             <a:solidFill>
               <a:srgbClr val="C00000"/>
             </a:solidFill>
-          </a:ln>
-        </p:spPr>
-        <p:style>
-          <a:lnRef idx="1">
-            <a:schemeClr val="accent1"/>
-          </a:lnRef>
-          <a:fillRef idx="3">
-            <a:schemeClr val="accent1"/>
-          </a:fillRef>
-          <a:effectRef idx="2">
-            <a:schemeClr val="accent1"/>
-          </a:effectRef>
-          <a:fontRef idx="minor">
-            <a:schemeClr val="lt1"/>
-          </a:fontRef>
-        </p:style>
-        <p:txBody>
-          <a:bodyPr rtlCol="0" anchor="ctr"/>
-          <a:lstStyle/>
-          <a:p>
-            <a:pPr algn="ctr"/>
-          </a:p>
-        </p:txBody>
-      </p:sp>
-      <p:sp>
-        <p:nvSpPr>
-          <p:cNvPr id="10" name="TextBox 9"/>
-          <p:cNvSpPr txBox="1"/>
-          <p:nvPr/>
-        </p:nvSpPr>
-        <p:spPr>
-          <a:xfrm>
-            <a:off x="216000" y="954000"/>
-            <a:ext cx="3774984" cy="1007999"/>
-          </a:xfrm>
-          <a:prstGeom prst="rect">
-            <a:avLst/>
-          </a:prstGeom>
-          <a:noFill/>
-        </p:spPr>
-        <p:txBody>
-          <a:bodyPr wrap="square" lIns="50800" rIns="50800" tIns="25400" bIns="25400">
-            <a:spAutoFit/>
-          </a:bodyPr>
-          <a:lstStyle/>
-          <a:p>
-            <a:pPr algn="l"/>
-            <a:r>
-              <a:rPr sz="950" b="0" i="0">
-                <a:solidFill>
-                  <a:srgbClr val="404040"/>
-                </a:solidFill>
-              </a:rPr>
-              <a:t>• 배치식: 분말 정지 → Pulse시간 = 노출시간</a:t>
-            </a:r>
-          </a:p>
-          <a:p>
-            <a:pPr algn="l"/>
-            <a:r>
-              <a:rPr sz="950" b="0" i="0">
-                <a:solidFill>
-                  <a:srgbClr val="404040"/>
-                </a:solidFill>
-              </a:rPr>
-              <a:t>• 연속식: 분말 비행 중 → Pulse시간 ≠ 노출시간</a:t>
-            </a:r>
-          </a:p>
-          <a:p>
-            <a:pPr algn="l"/>
-            <a:r>
-              <a:rPr sz="950" b="0" i="0">
-                <a:solidFill>
-                  <a:srgbClr val="404040"/>
-                </a:solidFill>
-              </a:rPr>
-              <a:t>• 직접 이전 시 두께 편차 &gt;30%</a:t>
-            </a:r>
-          </a:p>
-          <a:p>
-            <a:pPr algn="l"/>
-            <a:r>
-              <a:rPr sz="950" b="0" i="0">
-                <a:solidFill>
-                  <a:srgbClr val="404040"/>
-                </a:solidFill>
-              </a:rPr>
-              <a:t>  → 재현성 확보 불가</a:t>
-            </a:r>
-          </a:p>
-        </p:txBody>
-      </p:sp>
-      <p:sp>
-        <p:nvSpPr>
-          <p:cNvPr id="11" name="Can 10"/>
-          <p:cNvSpPr/>
-          <p:nvPr/>
-        </p:nvSpPr>
-        <p:spPr>
-          <a:xfrm>
-            <a:off x="2004492" y="1998000"/>
-            <a:ext cx="198000" cy="252000"/>
-          </a:xfrm>
-          <a:prstGeom prst="can">
-            <a:avLst/>
-          </a:prstGeom>
-          <a:solidFill>
-            <a:srgbClr val="1F4E79"/>
-          </a:solidFill>
-          <a:ln>
+            <a:ln>
+              <a:noFill/>
+            </a:ln>
+          </p:spPr>
+          <p:style>
+            <a:lnRef idx="1">
+              <a:schemeClr val="accent1"/>
+            </a:lnRef>
+            <a:fillRef idx="3">
+              <a:schemeClr val="accent1"/>
+            </a:fillRef>
+            <a:effectRef idx="2">
+              <a:schemeClr val="accent1"/>
+            </a:effectRef>
+            <a:fontRef idx="minor">
+              <a:schemeClr val="lt1"/>
+            </a:fontRef>
+          </p:style>
+          <p:txBody>
+            <a:bodyPr rtlCol="0" anchor="ctr"/>
+            <a:lstStyle/>
+            <a:p>
+              <a:pPr algn="ctr"/>
+              <a:endParaRPr/>
+            </a:p>
+          </p:txBody>
+        </p:sp>
+        <p:sp>
+          <p:nvSpPr>
+            <p:cNvPr id="8" name="TextBox 7"/>
+            <p:cNvSpPr txBox="1"/>
+            <p:nvPr/>
+          </p:nvSpPr>
+          <p:spPr>
+            <a:xfrm>
+              <a:off x="198000" y="694800"/>
+              <a:ext cx="3810984" cy="223200"/>
+            </a:xfrm>
+            <a:prstGeom prst="rect">
+              <a:avLst/>
+            </a:prstGeom>
             <a:noFill/>
-          </a:ln>
-        </p:spPr>
-        <p:style>
-          <a:lnRef idx="1">
-            <a:schemeClr val="accent1"/>
-          </a:lnRef>
-          <a:fillRef idx="3">
-            <a:schemeClr val="accent1"/>
-          </a:fillRef>
-          <a:effectRef idx="2">
-            <a:schemeClr val="accent1"/>
-          </a:effectRef>
-          <a:fontRef idx="minor">
-            <a:schemeClr val="lt1"/>
-          </a:fontRef>
-        </p:style>
-        <p:txBody>
-          <a:bodyPr rtlCol="0" anchor="ctr"/>
-          <a:lstStyle/>
-          <a:p>
-            <a:pPr algn="ctr"/>
-          </a:p>
-        </p:txBody>
-      </p:sp>
-      <p:sp>
-        <p:nvSpPr>
-          <p:cNvPr id="12" name="Rectangle 11"/>
-          <p:cNvSpPr/>
-          <p:nvPr/>
-        </p:nvSpPr>
-        <p:spPr>
-          <a:xfrm>
-            <a:off x="180000" y="2268000"/>
-            <a:ext cx="3846984" cy="234000"/>
-          </a:xfrm>
-          <a:prstGeom prst="rect">
-            <a:avLst/>
-          </a:prstGeom>
-          <a:solidFill>
-            <a:srgbClr val="375623"/>
-          </a:solidFill>
-          <a:ln>
+          </p:spPr>
+          <p:txBody>
+            <a:bodyPr wrap="square" lIns="50800" tIns="25400" rIns="50800" bIns="25400">
+              <a:spAutoFit/>
+            </a:bodyPr>
+            <a:lstStyle/>
+            <a:p>
+              <a:pPr algn="ctr"/>
+              <a:r>
+                <a:rPr sz="1000" b="1" i="0" dirty="0" err="1">
+                  <a:solidFill>
+                    <a:srgbClr val="FFFFFF"/>
+                  </a:solidFill>
+                </a:rPr>
+                <a:t>난제</a:t>
+              </a:r>
+              <a:r>
+                <a:rPr sz="1000" b="1" i="0" dirty="0">
+                  <a:solidFill>
+                    <a:srgbClr val="FFFFFF"/>
+                  </a:solidFill>
+                </a:rPr>
+                <a:t> ①</a:t>
+              </a:r>
+            </a:p>
+            <a:p>
+              <a:pPr algn="ctr"/>
+              <a:r>
+                <a:rPr sz="1000" b="1" i="0" dirty="0" err="1">
+                  <a:solidFill>
+                    <a:srgbClr val="FFFFFF"/>
+                  </a:solidFill>
+                </a:rPr>
+                <a:t>배치</a:t>
+              </a:r>
+              <a:r>
+                <a:rPr sz="1000" b="1" i="0" dirty="0">
+                  <a:solidFill>
+                    <a:srgbClr val="FFFFFF"/>
+                  </a:solidFill>
+                </a:rPr>
+                <a:t> → </a:t>
+              </a:r>
+              <a:r>
+                <a:rPr sz="1000" b="1" i="0" dirty="0" err="1">
+                  <a:solidFill>
+                    <a:srgbClr val="FFFFFF"/>
+                  </a:solidFill>
+                </a:rPr>
+                <a:t>연속</a:t>
+              </a:r>
+              <a:r>
+                <a:rPr sz="1000" b="1" i="0" dirty="0">
+                  <a:solidFill>
+                    <a:srgbClr val="FFFFFF"/>
+                  </a:solidFill>
+                </a:rPr>
+                <a:t> </a:t>
+              </a:r>
+              <a:r>
+                <a:rPr sz="1000" b="1" i="0" dirty="0" err="1">
+                  <a:solidFill>
+                    <a:srgbClr val="FFFFFF"/>
+                  </a:solidFill>
+                </a:rPr>
+                <a:t>이전</a:t>
+              </a:r>
+              <a:r>
+                <a:rPr sz="1000" b="1" i="0" dirty="0">
+                  <a:solidFill>
+                    <a:srgbClr val="FFFFFF"/>
+                  </a:solidFill>
+                </a:rPr>
+                <a:t> </a:t>
+              </a:r>
+              <a:r>
+                <a:rPr sz="1000" b="1" i="0" dirty="0" err="1">
+                  <a:solidFill>
+                    <a:srgbClr val="FFFFFF"/>
+                  </a:solidFill>
+                </a:rPr>
+                <a:t>불가</a:t>
+              </a:r>
+              <a:endParaRPr sz="1000" b="1" i="0" dirty="0">
+                <a:solidFill>
+                  <a:srgbClr val="FFFFFF"/>
+                </a:solidFill>
+              </a:endParaRPr>
+            </a:p>
+          </p:txBody>
+        </p:sp>
+        <p:sp>
+          <p:nvSpPr>
+            <p:cNvPr id="9" name="Rectangle 8"/>
+            <p:cNvSpPr/>
+            <p:nvPr/>
+          </p:nvSpPr>
+          <p:spPr>
+            <a:xfrm>
+              <a:off x="180000" y="928800"/>
+              <a:ext cx="3846984" cy="1044000"/>
+            </a:xfrm>
+            <a:prstGeom prst="rect">
+              <a:avLst/>
+            </a:prstGeom>
+            <a:solidFill>
+              <a:srgbClr val="FFCCCC"/>
+            </a:solidFill>
+            <a:ln w="6350">
+              <a:solidFill>
+                <a:srgbClr val="C00000"/>
+              </a:solidFill>
+            </a:ln>
+          </p:spPr>
+          <p:style>
+            <a:lnRef idx="1">
+              <a:schemeClr val="accent1"/>
+            </a:lnRef>
+            <a:fillRef idx="3">
+              <a:schemeClr val="accent1"/>
+            </a:fillRef>
+            <a:effectRef idx="2">
+              <a:schemeClr val="accent1"/>
+            </a:effectRef>
+            <a:fontRef idx="minor">
+              <a:schemeClr val="lt1"/>
+            </a:fontRef>
+          </p:style>
+          <p:txBody>
+            <a:bodyPr rtlCol="0" anchor="ctr"/>
+            <a:lstStyle/>
+            <a:p>
+              <a:pPr algn="ctr"/>
+              <a:endParaRPr/>
+            </a:p>
+          </p:txBody>
+        </p:sp>
+        <p:sp>
+          <p:nvSpPr>
+            <p:cNvPr id="10" name="TextBox 9"/>
+            <p:cNvSpPr txBox="1"/>
+            <p:nvPr/>
+          </p:nvSpPr>
+          <p:spPr>
+            <a:xfrm>
+              <a:off x="216000" y="954000"/>
+              <a:ext cx="3774984" cy="1007999"/>
+            </a:xfrm>
+            <a:prstGeom prst="rect">
+              <a:avLst/>
+            </a:prstGeom>
             <a:noFill/>
-          </a:ln>
-        </p:spPr>
-        <p:style>
-          <a:lnRef idx="1">
-            <a:schemeClr val="accent1"/>
-          </a:lnRef>
-          <a:fillRef idx="3">
-            <a:schemeClr val="accent1"/>
-          </a:fillRef>
-          <a:effectRef idx="2">
-            <a:schemeClr val="accent1"/>
-          </a:effectRef>
-          <a:fontRef idx="minor">
-            <a:schemeClr val="lt1"/>
-          </a:fontRef>
-        </p:style>
-        <p:txBody>
-          <a:bodyPr rtlCol="0" anchor="ctr"/>
-          <a:lstStyle/>
-          <a:p>
-            <a:pPr algn="ctr"/>
-          </a:p>
-        </p:txBody>
-      </p:sp>
-      <p:sp>
-        <p:nvSpPr>
-          <p:cNvPr id="13" name="TextBox 12"/>
-          <p:cNvSpPr txBox="1"/>
-          <p:nvPr/>
-        </p:nvSpPr>
-        <p:spPr>
-          <a:xfrm>
-            <a:off x="198000" y="2278800"/>
-            <a:ext cx="3810984" cy="223200"/>
-          </a:xfrm>
-          <a:prstGeom prst="rect">
-            <a:avLst/>
-          </a:prstGeom>
-          <a:noFill/>
-        </p:spPr>
-        <p:txBody>
-          <a:bodyPr wrap="square" lIns="50800" rIns="50800" tIns="25400" bIns="25400">
-            <a:spAutoFit/>
-          </a:bodyPr>
-          <a:lstStyle/>
-          <a:p>
-            <a:pPr algn="ctr"/>
-            <a:r>
-              <a:rPr sz="1000" b="1" i="0">
-                <a:solidFill>
-                  <a:srgbClr val="FFFFFF"/>
-                </a:solidFill>
-              </a:rPr>
-              <a:t>해결 ①</a:t>
-            </a:r>
-          </a:p>
-          <a:p>
-            <a:pPr algn="ctr"/>
-            <a:r>
-              <a:rPr sz="1000" b="1" i="0">
-                <a:solidFill>
-                  <a:srgbClr val="FFFFFF"/>
-                </a:solidFill>
-              </a:rPr>
-              <a:t>RTD 기반 정량 변환 알고리즘</a:t>
-            </a:r>
-          </a:p>
-        </p:txBody>
-      </p:sp>
-      <p:sp>
-        <p:nvSpPr>
-          <p:cNvPr id="14" name="Rectangle 13"/>
-          <p:cNvSpPr/>
-          <p:nvPr/>
-        </p:nvSpPr>
-        <p:spPr>
-          <a:xfrm>
-            <a:off x="180000" y="2520000"/>
-            <a:ext cx="3846984" cy="1260000"/>
-          </a:xfrm>
-          <a:prstGeom prst="rect">
-            <a:avLst/>
-          </a:prstGeom>
-          <a:solidFill>
-            <a:srgbClr val="E2EFDA"/>
-          </a:solidFill>
-          <a:ln w="6350">
+          </p:spPr>
+          <p:txBody>
+            <a:bodyPr wrap="square" lIns="50800" tIns="25400" rIns="50800" bIns="25400">
+              <a:spAutoFit/>
+            </a:bodyPr>
+            <a:lstStyle/>
+            <a:p>
+              <a:pPr algn="l"/>
+              <a:r>
+                <a:rPr sz="950" b="0" i="0">
+                  <a:solidFill>
+                    <a:srgbClr val="404040"/>
+                  </a:solidFill>
+                </a:rPr>
+                <a:t>• 배치식: 분말 정지 → Pulse시간 = 노출시간</a:t>
+              </a:r>
+            </a:p>
+            <a:p>
+              <a:pPr algn="l"/>
+              <a:r>
+                <a:rPr sz="950" b="0" i="0">
+                  <a:solidFill>
+                    <a:srgbClr val="404040"/>
+                  </a:solidFill>
+                </a:rPr>
+                <a:t>• 연속식: 분말 비행 중 → Pulse시간 ≠ 노출시간</a:t>
+              </a:r>
+            </a:p>
+            <a:p>
+              <a:pPr algn="l"/>
+              <a:r>
+                <a:rPr sz="950" b="0" i="0">
+                  <a:solidFill>
+                    <a:srgbClr val="404040"/>
+                  </a:solidFill>
+                </a:rPr>
+                <a:t>• 직접 이전 시 두께 편차 &gt;30%</a:t>
+              </a:r>
+            </a:p>
+            <a:p>
+              <a:pPr algn="l"/>
+              <a:r>
+                <a:rPr sz="950" b="0" i="0">
+                  <a:solidFill>
+                    <a:srgbClr val="404040"/>
+                  </a:solidFill>
+                </a:rPr>
+                <a:t>  → 재현성 확보 불가</a:t>
+              </a:r>
+            </a:p>
+          </p:txBody>
+        </p:sp>
+        <p:sp>
+          <p:nvSpPr>
+            <p:cNvPr id="11" name="Can 10"/>
+            <p:cNvSpPr/>
+            <p:nvPr/>
+          </p:nvSpPr>
+          <p:spPr>
+            <a:xfrm>
+              <a:off x="2004492" y="1998000"/>
+              <a:ext cx="198000" cy="252000"/>
+            </a:xfrm>
+            <a:prstGeom prst="can">
+              <a:avLst/>
+            </a:prstGeom>
+            <a:solidFill>
+              <a:srgbClr val="1F4E79"/>
+            </a:solidFill>
+            <a:ln>
+              <a:noFill/>
+            </a:ln>
+          </p:spPr>
+          <p:style>
+            <a:lnRef idx="1">
+              <a:schemeClr val="accent1"/>
+            </a:lnRef>
+            <a:fillRef idx="3">
+              <a:schemeClr val="accent1"/>
+            </a:fillRef>
+            <a:effectRef idx="2">
+              <a:schemeClr val="accent1"/>
+            </a:effectRef>
+            <a:fontRef idx="minor">
+              <a:schemeClr val="lt1"/>
+            </a:fontRef>
+          </p:style>
+          <p:txBody>
+            <a:bodyPr rtlCol="0" anchor="ctr"/>
+            <a:lstStyle/>
+            <a:p>
+              <a:pPr algn="ctr"/>
+              <a:endParaRPr/>
+            </a:p>
+          </p:txBody>
+        </p:sp>
+        <p:sp>
+          <p:nvSpPr>
+            <p:cNvPr id="12" name="Rectangle 11"/>
+            <p:cNvSpPr/>
+            <p:nvPr/>
+          </p:nvSpPr>
+          <p:spPr>
+            <a:xfrm>
+              <a:off x="180000" y="2268000"/>
+              <a:ext cx="3846984" cy="234000"/>
+            </a:xfrm>
+            <a:prstGeom prst="rect">
+              <a:avLst/>
+            </a:prstGeom>
             <a:solidFill>
               <a:srgbClr val="375623"/>
             </a:solidFill>
-          </a:ln>
-        </p:spPr>
-        <p:style>
-          <a:lnRef idx="1">
-            <a:schemeClr val="accent1"/>
-          </a:lnRef>
-          <a:fillRef idx="3">
-            <a:schemeClr val="accent1"/>
-          </a:fillRef>
-          <a:effectRef idx="2">
-            <a:schemeClr val="accent1"/>
-          </a:effectRef>
-          <a:fontRef idx="minor">
-            <a:schemeClr val="lt1"/>
-          </a:fontRef>
-        </p:style>
-        <p:txBody>
-          <a:bodyPr rtlCol="0" anchor="ctr"/>
-          <a:lstStyle/>
-          <a:p>
-            <a:pPr algn="ctr"/>
-          </a:p>
-        </p:txBody>
-      </p:sp>
-      <p:sp>
-        <p:nvSpPr>
-          <p:cNvPr id="15" name="TextBox 14"/>
-          <p:cNvSpPr txBox="1"/>
-          <p:nvPr/>
-        </p:nvSpPr>
-        <p:spPr>
-          <a:xfrm>
-            <a:off x="216000" y="2556000"/>
-            <a:ext cx="3774984" cy="1206000"/>
-          </a:xfrm>
-          <a:prstGeom prst="rect">
-            <a:avLst/>
-          </a:prstGeom>
-          <a:noFill/>
-        </p:spPr>
-        <p:txBody>
-          <a:bodyPr wrap="square" lIns="50800" rIns="50800" tIns="25400" bIns="25400">
-            <a:spAutoFit/>
-          </a:bodyPr>
-          <a:lstStyle/>
-          <a:p>
-            <a:pPr algn="l"/>
-            <a:r>
-              <a:rPr sz="950" b="0" i="0">
-                <a:solidFill>
-                  <a:srgbClr val="404040"/>
-                </a:solidFill>
-              </a:rPr>
-              <a:t>• 체류시간 분포(RTD) 측정</a:t>
-            </a:r>
-          </a:p>
-          <a:p>
-            <a:pPr algn="l"/>
-            <a:r>
-              <a:rPr sz="950" b="0" i="0">
-                <a:solidFill>
-                  <a:srgbClr val="404040"/>
-                </a:solidFill>
-              </a:rPr>
-              <a:t>  최소 체류시간: μ - 2σ ≥ t_pulse</a:t>
-            </a:r>
-          </a:p>
-          <a:p>
-            <a:pPr algn="l"/>
-            <a:r>
-              <a:rPr sz="950" b="0" i="0">
-                <a:solidFill>
-                  <a:srgbClr val="404040"/>
-                </a:solidFill>
-              </a:rPr>
-              <a:t>• 배치식 변수 → 연속식 변수 1:1 매핑</a:t>
-            </a:r>
-          </a:p>
-          <a:p>
-            <a:pPr algn="l"/>
-            <a:r>
-              <a:rPr sz="950" b="0" i="0">
-                <a:solidFill>
-                  <a:srgbClr val="404040"/>
-                </a:solidFill>
-              </a:rPr>
-              <a:t>• 기계연 레시피 → 대성기계 이전</a:t>
-            </a:r>
-          </a:p>
-          <a:p>
-            <a:pPr algn="l"/>
-            <a:r>
-              <a:rPr sz="950" b="0" i="0">
-                <a:solidFill>
-                  <a:srgbClr val="404040"/>
-                </a:solidFill>
-              </a:rPr>
-              <a:t>★ 세계 최초 정량적 이전 방법론 확립</a:t>
-            </a:r>
-          </a:p>
-        </p:txBody>
-      </p:sp>
-      <p:sp>
-        <p:nvSpPr>
-          <p:cNvPr id="16" name="Rectangle 15"/>
-          <p:cNvSpPr/>
-          <p:nvPr/>
-        </p:nvSpPr>
-        <p:spPr>
-          <a:xfrm>
-            <a:off x="4098984" y="684000"/>
-            <a:ext cx="3846984" cy="234000"/>
-          </a:xfrm>
-          <a:prstGeom prst="rect">
-            <a:avLst/>
-          </a:prstGeom>
-          <a:solidFill>
-            <a:srgbClr val="C00000"/>
-          </a:solidFill>
-          <a:ln>
+            <a:ln>
+              <a:noFill/>
+            </a:ln>
+          </p:spPr>
+          <p:style>
+            <a:lnRef idx="1">
+              <a:schemeClr val="accent1"/>
+            </a:lnRef>
+            <a:fillRef idx="3">
+              <a:schemeClr val="accent1"/>
+            </a:fillRef>
+            <a:effectRef idx="2">
+              <a:schemeClr val="accent1"/>
+            </a:effectRef>
+            <a:fontRef idx="minor">
+              <a:schemeClr val="lt1"/>
+            </a:fontRef>
+          </p:style>
+          <p:txBody>
+            <a:bodyPr rtlCol="0" anchor="ctr"/>
+            <a:lstStyle/>
+            <a:p>
+              <a:pPr algn="ctr"/>
+              <a:endParaRPr/>
+            </a:p>
+          </p:txBody>
+        </p:sp>
+        <p:sp>
+          <p:nvSpPr>
+            <p:cNvPr id="13" name="TextBox 12"/>
+            <p:cNvSpPr txBox="1"/>
+            <p:nvPr/>
+          </p:nvSpPr>
+          <p:spPr>
+            <a:xfrm>
+              <a:off x="198000" y="2278800"/>
+              <a:ext cx="3810984" cy="223200"/>
+            </a:xfrm>
+            <a:prstGeom prst="rect">
+              <a:avLst/>
+            </a:prstGeom>
             <a:noFill/>
-          </a:ln>
-        </p:spPr>
-        <p:style>
-          <a:lnRef idx="1">
-            <a:schemeClr val="accent1"/>
-          </a:lnRef>
-          <a:fillRef idx="3">
-            <a:schemeClr val="accent1"/>
-          </a:fillRef>
-          <a:effectRef idx="2">
-            <a:schemeClr val="accent1"/>
-          </a:effectRef>
-          <a:fontRef idx="minor">
-            <a:schemeClr val="lt1"/>
-          </a:fontRef>
-        </p:style>
-        <p:txBody>
-          <a:bodyPr rtlCol="0" anchor="ctr"/>
-          <a:lstStyle/>
-          <a:p>
-            <a:pPr algn="ctr"/>
-          </a:p>
-        </p:txBody>
-      </p:sp>
-      <p:sp>
-        <p:nvSpPr>
-          <p:cNvPr id="17" name="TextBox 16"/>
-          <p:cNvSpPr txBox="1"/>
-          <p:nvPr/>
-        </p:nvSpPr>
-        <p:spPr>
-          <a:xfrm>
-            <a:off x="4116984" y="694800"/>
-            <a:ext cx="3810984" cy="223200"/>
-          </a:xfrm>
-          <a:prstGeom prst="rect">
-            <a:avLst/>
-          </a:prstGeom>
-          <a:noFill/>
-        </p:spPr>
-        <p:txBody>
-          <a:bodyPr wrap="square" lIns="50800" rIns="50800" tIns="25400" bIns="25400">
-            <a:spAutoFit/>
-          </a:bodyPr>
-          <a:lstStyle/>
-          <a:p>
-            <a:pPr algn="ctr"/>
-            <a:r>
-              <a:rPr sz="1000" b="1" i="0">
-                <a:solidFill>
-                  <a:srgbClr val="FFFFFF"/>
-                </a:solidFill>
-              </a:rPr>
-              <a:t>난제 ②</a:t>
-            </a:r>
-          </a:p>
-          <a:p>
-            <a:pPr algn="ctr"/>
-            <a:r>
-              <a:rPr sz="1000" b="1" i="0">
-                <a:solidFill>
-                  <a:srgbClr val="FFFFFF"/>
-                </a:solidFill>
-              </a:rPr>
-              <a:t>V₂O₅ 전기화학적 활성</a:t>
-            </a:r>
-          </a:p>
-        </p:txBody>
-      </p:sp>
-      <p:sp>
-        <p:nvSpPr>
-          <p:cNvPr id="18" name="Rectangle 17"/>
-          <p:cNvSpPr/>
-          <p:nvPr/>
-        </p:nvSpPr>
-        <p:spPr>
-          <a:xfrm>
-            <a:off x="4098984" y="928800"/>
-            <a:ext cx="3846984" cy="1044000"/>
-          </a:xfrm>
-          <a:prstGeom prst="rect">
-            <a:avLst/>
-          </a:prstGeom>
-          <a:solidFill>
-            <a:srgbClr val="FFCCCC"/>
-          </a:solidFill>
-          <a:ln w="6350">
+          </p:spPr>
+          <p:txBody>
+            <a:bodyPr wrap="square" lIns="50800" tIns="25400" rIns="50800" bIns="25400">
+              <a:spAutoFit/>
+            </a:bodyPr>
+            <a:lstStyle/>
+            <a:p>
+              <a:pPr algn="ctr"/>
+              <a:r>
+                <a:rPr sz="1000" b="1" i="0">
+                  <a:solidFill>
+                    <a:srgbClr val="FFFFFF"/>
+                  </a:solidFill>
+                </a:rPr>
+                <a:t>해결 ①</a:t>
+              </a:r>
+            </a:p>
+            <a:p>
+              <a:pPr algn="ctr"/>
+              <a:r>
+                <a:rPr sz="1000" b="1" i="0">
+                  <a:solidFill>
+                    <a:srgbClr val="FFFFFF"/>
+                  </a:solidFill>
+                </a:rPr>
+                <a:t>RTD 기반 정량 변환 알고리즘</a:t>
+              </a:r>
+            </a:p>
+          </p:txBody>
+        </p:sp>
+        <p:sp>
+          <p:nvSpPr>
+            <p:cNvPr id="14" name="Rectangle 13"/>
+            <p:cNvSpPr/>
+            <p:nvPr/>
+          </p:nvSpPr>
+          <p:spPr>
+            <a:xfrm>
+              <a:off x="180000" y="2520000"/>
+              <a:ext cx="3846984" cy="1260000"/>
+            </a:xfrm>
+            <a:prstGeom prst="rect">
+              <a:avLst/>
+            </a:prstGeom>
+            <a:solidFill>
+              <a:srgbClr val="E2EFDA"/>
+            </a:solidFill>
+            <a:ln w="6350">
+              <a:solidFill>
+                <a:srgbClr val="375623"/>
+              </a:solidFill>
+            </a:ln>
+          </p:spPr>
+          <p:style>
+            <a:lnRef idx="1">
+              <a:schemeClr val="accent1"/>
+            </a:lnRef>
+            <a:fillRef idx="3">
+              <a:schemeClr val="accent1"/>
+            </a:fillRef>
+            <a:effectRef idx="2">
+              <a:schemeClr val="accent1"/>
+            </a:effectRef>
+            <a:fontRef idx="minor">
+              <a:schemeClr val="lt1"/>
+            </a:fontRef>
+          </p:style>
+          <p:txBody>
+            <a:bodyPr rtlCol="0" anchor="ctr"/>
+            <a:lstStyle/>
+            <a:p>
+              <a:pPr algn="ctr"/>
+              <a:endParaRPr/>
+            </a:p>
+          </p:txBody>
+        </p:sp>
+        <p:sp>
+          <p:nvSpPr>
+            <p:cNvPr id="15" name="TextBox 14"/>
+            <p:cNvSpPr txBox="1"/>
+            <p:nvPr/>
+          </p:nvSpPr>
+          <p:spPr>
+            <a:xfrm>
+              <a:off x="216000" y="2556000"/>
+              <a:ext cx="3774984" cy="1206000"/>
+            </a:xfrm>
+            <a:prstGeom prst="rect">
+              <a:avLst/>
+            </a:prstGeom>
+            <a:noFill/>
+          </p:spPr>
+          <p:txBody>
+            <a:bodyPr wrap="square" lIns="50800" tIns="25400" rIns="50800" bIns="25400">
+              <a:spAutoFit/>
+            </a:bodyPr>
+            <a:lstStyle/>
+            <a:p>
+              <a:pPr algn="l"/>
+              <a:r>
+                <a:rPr sz="950" b="0" i="0">
+                  <a:solidFill>
+                    <a:srgbClr val="404040"/>
+                  </a:solidFill>
+                </a:rPr>
+                <a:t>• 체류시간 분포(RTD) 측정</a:t>
+              </a:r>
+            </a:p>
+            <a:p>
+              <a:pPr algn="l"/>
+              <a:r>
+                <a:rPr sz="950" b="0" i="0">
+                  <a:solidFill>
+                    <a:srgbClr val="404040"/>
+                  </a:solidFill>
+                </a:rPr>
+                <a:t>  최소 체류시간: μ - 2σ ≥ t_pulse</a:t>
+              </a:r>
+            </a:p>
+            <a:p>
+              <a:pPr algn="l"/>
+              <a:r>
+                <a:rPr sz="950" b="0" i="0">
+                  <a:solidFill>
+                    <a:srgbClr val="404040"/>
+                  </a:solidFill>
+                </a:rPr>
+                <a:t>• 배치식 변수 → 연속식 변수 1:1 매핑</a:t>
+              </a:r>
+            </a:p>
+            <a:p>
+              <a:pPr algn="l"/>
+              <a:r>
+                <a:rPr sz="950" b="0" i="0">
+                  <a:solidFill>
+                    <a:srgbClr val="404040"/>
+                  </a:solidFill>
+                </a:rPr>
+                <a:t>• 기계연 레시피 → 대성기계 이전</a:t>
+              </a:r>
+            </a:p>
+            <a:p>
+              <a:pPr algn="l"/>
+              <a:r>
+                <a:rPr sz="950" b="0" i="0">
+                  <a:solidFill>
+                    <a:srgbClr val="404040"/>
+                  </a:solidFill>
+                </a:rPr>
+                <a:t>★ 세계 최초 정량적 이전 방법론 확립</a:t>
+              </a:r>
+            </a:p>
+          </p:txBody>
+        </p:sp>
+        <p:sp>
+          <p:nvSpPr>
+            <p:cNvPr id="16" name="Rectangle 15"/>
+            <p:cNvSpPr/>
+            <p:nvPr/>
+          </p:nvSpPr>
+          <p:spPr>
+            <a:xfrm>
+              <a:off x="4098984" y="684000"/>
+              <a:ext cx="3846984" cy="234000"/>
+            </a:xfrm>
+            <a:prstGeom prst="rect">
+              <a:avLst/>
+            </a:prstGeom>
             <a:solidFill>
               <a:srgbClr val="C00000"/>
             </a:solidFill>
-          </a:ln>
-        </p:spPr>
-        <p:style>
-          <a:lnRef idx="1">
-            <a:schemeClr val="accent1"/>
-          </a:lnRef>
-          <a:fillRef idx="3">
-            <a:schemeClr val="accent1"/>
-          </a:fillRef>
-          <a:effectRef idx="2">
-            <a:schemeClr val="accent1"/>
-          </a:effectRef>
-          <a:fontRef idx="minor">
-            <a:schemeClr val="lt1"/>
-          </a:fontRef>
-        </p:style>
-        <p:txBody>
-          <a:bodyPr rtlCol="0" anchor="ctr"/>
-          <a:lstStyle/>
-          <a:p>
-            <a:pPr algn="ctr"/>
-          </a:p>
-        </p:txBody>
-      </p:sp>
-      <p:sp>
-        <p:nvSpPr>
-          <p:cNvPr id="19" name="TextBox 18"/>
-          <p:cNvSpPr txBox="1"/>
-          <p:nvPr/>
-        </p:nvSpPr>
-        <p:spPr>
-          <a:xfrm>
-            <a:off x="4134983" y="954000"/>
-            <a:ext cx="3774984" cy="1007999"/>
-          </a:xfrm>
-          <a:prstGeom prst="rect">
-            <a:avLst/>
-          </a:prstGeom>
-          <a:noFill/>
-        </p:spPr>
-        <p:txBody>
-          <a:bodyPr wrap="square" lIns="50800" rIns="50800" tIns="25400" bIns="25400">
-            <a:spAutoFit/>
-          </a:bodyPr>
-          <a:lstStyle/>
-          <a:p>
-            <a:pPr algn="l"/>
-            <a:r>
-              <a:rPr sz="950" b="0" i="0">
-                <a:solidFill>
-                  <a:srgbClr val="404040"/>
-                </a:solidFill>
-              </a:rPr>
-              <a:t>• V₂O₅ 운전전압: 2.0–3.5V</a:t>
-            </a:r>
-          </a:p>
-          <a:p>
-            <a:pPr algn="l"/>
-            <a:r>
-              <a:rPr sz="950" b="0" i="0">
-                <a:solidFill>
-                  <a:srgbClr val="404040"/>
-                </a:solidFill>
-              </a:rPr>
-              <a:t>• SIB 양극 운전전압: 2.0–4.2V</a:t>
-            </a:r>
-          </a:p>
-          <a:p>
-            <a:pPr algn="l"/>
-            <a:r>
-              <a:rPr sz="950" b="0" i="0">
-                <a:solidFill>
-                  <a:srgbClr val="404040"/>
-                </a:solidFill>
-              </a:rPr>
-              <a:t>• 전압범위 중복 → 두꺼우면 독립 전극</a:t>
-            </a:r>
-          </a:p>
-          <a:p>
-            <a:pPr algn="l"/>
-            <a:r>
-              <a:rPr sz="950" b="0" i="0">
-                <a:solidFill>
-                  <a:srgbClr val="404040"/>
-                </a:solidFill>
-              </a:rPr>
-              <a:t>  → 전압 프로파일 교란 → 성능 저하</a:t>
-            </a:r>
-          </a:p>
-        </p:txBody>
-      </p:sp>
-      <p:sp>
-        <p:nvSpPr>
-          <p:cNvPr id="20" name="Can 19"/>
-          <p:cNvSpPr/>
-          <p:nvPr/>
-        </p:nvSpPr>
-        <p:spPr>
-          <a:xfrm>
-            <a:off x="5923476" y="1998000"/>
-            <a:ext cx="198000" cy="252000"/>
-          </a:xfrm>
-          <a:prstGeom prst="can">
-            <a:avLst/>
-          </a:prstGeom>
-          <a:solidFill>
-            <a:srgbClr val="1F4E79"/>
-          </a:solidFill>
-          <a:ln>
+            <a:ln>
+              <a:noFill/>
+            </a:ln>
+          </p:spPr>
+          <p:style>
+            <a:lnRef idx="1">
+              <a:schemeClr val="accent1"/>
+            </a:lnRef>
+            <a:fillRef idx="3">
+              <a:schemeClr val="accent1"/>
+            </a:fillRef>
+            <a:effectRef idx="2">
+              <a:schemeClr val="accent1"/>
+            </a:effectRef>
+            <a:fontRef idx="minor">
+              <a:schemeClr val="lt1"/>
+            </a:fontRef>
+          </p:style>
+          <p:txBody>
+            <a:bodyPr rtlCol="0" anchor="ctr"/>
+            <a:lstStyle/>
+            <a:p>
+              <a:pPr algn="ctr"/>
+              <a:endParaRPr/>
+            </a:p>
+          </p:txBody>
+        </p:sp>
+        <p:sp>
+          <p:nvSpPr>
+            <p:cNvPr id="17" name="TextBox 16"/>
+            <p:cNvSpPr txBox="1"/>
+            <p:nvPr/>
+          </p:nvSpPr>
+          <p:spPr>
+            <a:xfrm>
+              <a:off x="4116984" y="694800"/>
+              <a:ext cx="3810984" cy="223200"/>
+            </a:xfrm>
+            <a:prstGeom prst="rect">
+              <a:avLst/>
+            </a:prstGeom>
             <a:noFill/>
-          </a:ln>
-        </p:spPr>
-        <p:style>
-          <a:lnRef idx="1">
-            <a:schemeClr val="accent1"/>
-          </a:lnRef>
-          <a:fillRef idx="3">
-            <a:schemeClr val="accent1"/>
-          </a:fillRef>
-          <a:effectRef idx="2">
-            <a:schemeClr val="accent1"/>
-          </a:effectRef>
-          <a:fontRef idx="minor">
-            <a:schemeClr val="lt1"/>
-          </a:fontRef>
-        </p:style>
-        <p:txBody>
-          <a:bodyPr rtlCol="0" anchor="ctr"/>
-          <a:lstStyle/>
-          <a:p>
-            <a:pPr algn="ctr"/>
-          </a:p>
-        </p:txBody>
-      </p:sp>
-      <p:sp>
-        <p:nvSpPr>
-          <p:cNvPr id="21" name="Rectangle 20"/>
-          <p:cNvSpPr/>
-          <p:nvPr/>
-        </p:nvSpPr>
-        <p:spPr>
-          <a:xfrm>
-            <a:off x="4098984" y="2268000"/>
-            <a:ext cx="3846984" cy="234000"/>
-          </a:xfrm>
-          <a:prstGeom prst="rect">
-            <a:avLst/>
-          </a:prstGeom>
-          <a:solidFill>
-            <a:srgbClr val="375623"/>
-          </a:solidFill>
-          <a:ln>
+          </p:spPr>
+          <p:txBody>
+            <a:bodyPr wrap="square" lIns="50800" tIns="25400" rIns="50800" bIns="25400">
+              <a:spAutoFit/>
+            </a:bodyPr>
+            <a:lstStyle/>
+            <a:p>
+              <a:pPr algn="ctr"/>
+              <a:r>
+                <a:rPr sz="1000" b="1" i="0">
+                  <a:solidFill>
+                    <a:srgbClr val="FFFFFF"/>
+                  </a:solidFill>
+                </a:rPr>
+                <a:t>난제 ②</a:t>
+              </a:r>
+            </a:p>
+            <a:p>
+              <a:pPr algn="ctr"/>
+              <a:r>
+                <a:rPr sz="1000" b="1" i="0">
+                  <a:solidFill>
+                    <a:srgbClr val="FFFFFF"/>
+                  </a:solidFill>
+                </a:rPr>
+                <a:t>V₂O₅ 전기화학적 활성</a:t>
+              </a:r>
+            </a:p>
+          </p:txBody>
+        </p:sp>
+        <p:sp>
+          <p:nvSpPr>
+            <p:cNvPr id="18" name="Rectangle 17"/>
+            <p:cNvSpPr/>
+            <p:nvPr/>
+          </p:nvSpPr>
+          <p:spPr>
+            <a:xfrm>
+              <a:off x="4098984" y="928800"/>
+              <a:ext cx="3846984" cy="1044000"/>
+            </a:xfrm>
+            <a:prstGeom prst="rect">
+              <a:avLst/>
+            </a:prstGeom>
+            <a:solidFill>
+              <a:srgbClr val="FFCCCC"/>
+            </a:solidFill>
+            <a:ln w="6350">
+              <a:solidFill>
+                <a:srgbClr val="C00000"/>
+              </a:solidFill>
+            </a:ln>
+          </p:spPr>
+          <p:style>
+            <a:lnRef idx="1">
+              <a:schemeClr val="accent1"/>
+            </a:lnRef>
+            <a:fillRef idx="3">
+              <a:schemeClr val="accent1"/>
+            </a:fillRef>
+            <a:effectRef idx="2">
+              <a:schemeClr val="accent1"/>
+            </a:effectRef>
+            <a:fontRef idx="minor">
+              <a:schemeClr val="lt1"/>
+            </a:fontRef>
+          </p:style>
+          <p:txBody>
+            <a:bodyPr rtlCol="0" anchor="ctr"/>
+            <a:lstStyle/>
+            <a:p>
+              <a:pPr algn="ctr"/>
+              <a:endParaRPr/>
+            </a:p>
+          </p:txBody>
+        </p:sp>
+        <p:sp>
+          <p:nvSpPr>
+            <p:cNvPr id="19" name="TextBox 18"/>
+            <p:cNvSpPr txBox="1"/>
+            <p:nvPr/>
+          </p:nvSpPr>
+          <p:spPr>
+            <a:xfrm>
+              <a:off x="4134983" y="954000"/>
+              <a:ext cx="3774984" cy="1007999"/>
+            </a:xfrm>
+            <a:prstGeom prst="rect">
+              <a:avLst/>
+            </a:prstGeom>
             <a:noFill/>
-          </a:ln>
-        </p:spPr>
-        <p:style>
-          <a:lnRef idx="1">
-            <a:schemeClr val="accent1"/>
-          </a:lnRef>
-          <a:fillRef idx="3">
-            <a:schemeClr val="accent1"/>
-          </a:fillRef>
-          <a:effectRef idx="2">
-            <a:schemeClr val="accent1"/>
-          </a:effectRef>
-          <a:fontRef idx="minor">
-            <a:schemeClr val="lt1"/>
-          </a:fontRef>
-        </p:style>
-        <p:txBody>
-          <a:bodyPr rtlCol="0" anchor="ctr"/>
-          <a:lstStyle/>
-          <a:p>
-            <a:pPr algn="ctr"/>
-          </a:p>
-        </p:txBody>
-      </p:sp>
-      <p:sp>
-        <p:nvSpPr>
-          <p:cNvPr id="22" name="TextBox 21"/>
-          <p:cNvSpPr txBox="1"/>
-          <p:nvPr/>
-        </p:nvSpPr>
-        <p:spPr>
-          <a:xfrm>
-            <a:off x="4116984" y="2278800"/>
-            <a:ext cx="3810984" cy="223200"/>
-          </a:xfrm>
-          <a:prstGeom prst="rect">
-            <a:avLst/>
-          </a:prstGeom>
-          <a:noFill/>
-        </p:spPr>
-        <p:txBody>
-          <a:bodyPr wrap="square" lIns="50800" rIns="50800" tIns="25400" bIns="25400">
-            <a:spAutoFit/>
-          </a:bodyPr>
-          <a:lstStyle/>
-          <a:p>
-            <a:pPr algn="ctr"/>
-            <a:r>
-              <a:rPr sz="1000" b="1" i="0">
-                <a:solidFill>
-                  <a:srgbClr val="FFFFFF"/>
-                </a:solidFill>
-              </a:rPr>
-              <a:t>해결 ②</a:t>
-            </a:r>
-          </a:p>
-          <a:p>
-            <a:pPr algn="ctr"/>
-            <a:r>
-              <a:rPr sz="1000" b="1" i="0">
-                <a:solidFill>
-                  <a:srgbClr val="FFFFFF"/>
-                </a:solidFill>
-              </a:rPr>
-              <a:t>ALD 이중층 설계로 활성 차단</a:t>
-            </a:r>
-          </a:p>
-        </p:txBody>
-      </p:sp>
-      <p:sp>
-        <p:nvSpPr>
-          <p:cNvPr id="23" name="Rectangle 22"/>
-          <p:cNvSpPr/>
-          <p:nvPr/>
-        </p:nvSpPr>
-        <p:spPr>
-          <a:xfrm>
-            <a:off x="4098984" y="2520000"/>
-            <a:ext cx="3846984" cy="1260000"/>
-          </a:xfrm>
-          <a:prstGeom prst="rect">
-            <a:avLst/>
-          </a:prstGeom>
-          <a:solidFill>
-            <a:srgbClr val="E2EFDA"/>
-          </a:solidFill>
-          <a:ln w="6350">
+          </p:spPr>
+          <p:txBody>
+            <a:bodyPr wrap="square" lIns="50800" tIns="25400" rIns="50800" bIns="25400">
+              <a:spAutoFit/>
+            </a:bodyPr>
+            <a:lstStyle/>
+            <a:p>
+              <a:pPr algn="l"/>
+              <a:r>
+                <a:rPr sz="950" b="0" i="0">
+                  <a:solidFill>
+                    <a:srgbClr val="404040"/>
+                  </a:solidFill>
+                </a:rPr>
+                <a:t>• V₂O₅ 운전전압: 2.0–3.5V</a:t>
+              </a:r>
+            </a:p>
+            <a:p>
+              <a:pPr algn="l"/>
+              <a:r>
+                <a:rPr sz="950" b="0" i="0">
+                  <a:solidFill>
+                    <a:srgbClr val="404040"/>
+                  </a:solidFill>
+                </a:rPr>
+                <a:t>• SIB 양극 운전전압: 2.0–4.2V</a:t>
+              </a:r>
+            </a:p>
+            <a:p>
+              <a:pPr algn="l"/>
+              <a:r>
+                <a:rPr sz="950" b="0" i="0">
+                  <a:solidFill>
+                    <a:srgbClr val="404040"/>
+                  </a:solidFill>
+                </a:rPr>
+                <a:t>• 전압범위 중복 → 두꺼우면 독립 전극</a:t>
+              </a:r>
+            </a:p>
+            <a:p>
+              <a:pPr algn="l"/>
+              <a:r>
+                <a:rPr sz="950" b="0" i="0">
+                  <a:solidFill>
+                    <a:srgbClr val="404040"/>
+                  </a:solidFill>
+                </a:rPr>
+                <a:t>  → 전압 프로파일 교란 → 성능 저하</a:t>
+              </a:r>
+            </a:p>
+          </p:txBody>
+        </p:sp>
+        <p:sp>
+          <p:nvSpPr>
+            <p:cNvPr id="20" name="Can 19"/>
+            <p:cNvSpPr/>
+            <p:nvPr/>
+          </p:nvSpPr>
+          <p:spPr>
+            <a:xfrm>
+              <a:off x="5923476" y="1998000"/>
+              <a:ext cx="198000" cy="252000"/>
+            </a:xfrm>
+            <a:prstGeom prst="can">
+              <a:avLst/>
+            </a:prstGeom>
+            <a:solidFill>
+              <a:srgbClr val="1F4E79"/>
+            </a:solidFill>
+            <a:ln>
+              <a:noFill/>
+            </a:ln>
+          </p:spPr>
+          <p:style>
+            <a:lnRef idx="1">
+              <a:schemeClr val="accent1"/>
+            </a:lnRef>
+            <a:fillRef idx="3">
+              <a:schemeClr val="accent1"/>
+            </a:fillRef>
+            <a:effectRef idx="2">
+              <a:schemeClr val="accent1"/>
+            </a:effectRef>
+            <a:fontRef idx="minor">
+              <a:schemeClr val="lt1"/>
+            </a:fontRef>
+          </p:style>
+          <p:txBody>
+            <a:bodyPr rtlCol="0" anchor="ctr"/>
+            <a:lstStyle/>
+            <a:p>
+              <a:pPr algn="ctr"/>
+              <a:endParaRPr/>
+            </a:p>
+          </p:txBody>
+        </p:sp>
+        <p:sp>
+          <p:nvSpPr>
+            <p:cNvPr id="21" name="Rectangle 20"/>
+            <p:cNvSpPr/>
+            <p:nvPr/>
+          </p:nvSpPr>
+          <p:spPr>
+            <a:xfrm>
+              <a:off x="4098984" y="2268000"/>
+              <a:ext cx="3846984" cy="234000"/>
+            </a:xfrm>
+            <a:prstGeom prst="rect">
+              <a:avLst/>
+            </a:prstGeom>
             <a:solidFill>
               <a:srgbClr val="375623"/>
             </a:solidFill>
-          </a:ln>
-        </p:spPr>
-        <p:style>
-          <a:lnRef idx="1">
-            <a:schemeClr val="accent1"/>
-          </a:lnRef>
-          <a:fillRef idx="3">
-            <a:schemeClr val="accent1"/>
-          </a:fillRef>
-          <a:effectRef idx="2">
-            <a:schemeClr val="accent1"/>
-          </a:effectRef>
-          <a:fontRef idx="minor">
-            <a:schemeClr val="lt1"/>
-          </a:fontRef>
-        </p:style>
-        <p:txBody>
-          <a:bodyPr rtlCol="0" anchor="ctr"/>
-          <a:lstStyle/>
-          <a:p>
-            <a:pPr algn="ctr"/>
-          </a:p>
-        </p:txBody>
-      </p:sp>
-      <p:sp>
-        <p:nvSpPr>
-          <p:cNvPr id="24" name="TextBox 23"/>
-          <p:cNvSpPr txBox="1"/>
-          <p:nvPr/>
-        </p:nvSpPr>
-        <p:spPr>
-          <a:xfrm>
-            <a:off x="4134983" y="2556000"/>
-            <a:ext cx="3774984" cy="1206000"/>
-          </a:xfrm>
-          <a:prstGeom prst="rect">
-            <a:avLst/>
-          </a:prstGeom>
-          <a:noFill/>
-        </p:spPr>
-        <p:txBody>
-          <a:bodyPr wrap="square" lIns="50800" rIns="50800" tIns="25400" bIns="25400">
-            <a:spAutoFit/>
-          </a:bodyPr>
-          <a:lstStyle/>
-          <a:p>
-            <a:pPr algn="l"/>
-            <a:r>
-              <a:rPr sz="950" b="0" i="0">
-                <a:solidFill>
-                  <a:srgbClr val="404040"/>
-                </a:solidFill>
-              </a:rPr>
-              <a:t>• ALD 자기제한: 1사이클 ≈ 0.5Å</a:t>
-            </a:r>
-          </a:p>
-          <a:p>
-            <a:pPr algn="l"/>
-            <a:r>
-              <a:rPr sz="950" b="0" i="0">
-                <a:solidFill>
-                  <a:srgbClr val="404040"/>
-                </a:solidFill>
-              </a:rPr>
-              <a:t>  → 1–2 nm (5–10사이클) 정밀 제어</a:t>
-            </a:r>
-          </a:p>
-          <a:p>
-            <a:pPr algn="l"/>
-            <a:r>
-              <a:rPr sz="950" b="0" i="0">
-                <a:solidFill>
-                  <a:srgbClr val="404040"/>
-                </a:solidFill>
-              </a:rPr>
-              <a:t>• 비정질(amorphous) VOₓ 선호</a:t>
-            </a:r>
-          </a:p>
-          <a:p>
-            <a:pPr algn="l"/>
-            <a:r>
-              <a:rPr sz="950" b="0" i="0">
-                <a:solidFill>
-                  <a:srgbClr val="404040"/>
-                </a:solidFill>
-              </a:rPr>
-              <a:t>• V₂O₅(내층)/TiO₂(외층) 이중층:</a:t>
-            </a:r>
-          </a:p>
-          <a:p>
-            <a:pPr algn="l"/>
-            <a:r>
-              <a:rPr sz="950" b="0" i="0">
-                <a:solidFill>
-                  <a:srgbClr val="404040"/>
-                </a:solidFill>
-              </a:rPr>
-              <a:t>  TiO₂ 외층이 전해질 직접 접촉 차단</a:t>
-            </a:r>
-          </a:p>
-          <a:p>
-            <a:pPr algn="l"/>
-            <a:r>
-              <a:rPr sz="950" b="0" i="0">
-                <a:solidFill>
-                  <a:srgbClr val="404040"/>
-                </a:solidFill>
-              </a:rPr>
-              <a:t>  Rct: 688 Ω → 202 Ω (1/3 수준)</a:t>
-            </a:r>
-          </a:p>
-        </p:txBody>
-      </p:sp>
-      <p:sp>
-        <p:nvSpPr>
-          <p:cNvPr id="25" name="Rectangle 24"/>
-          <p:cNvSpPr/>
-          <p:nvPr/>
-        </p:nvSpPr>
-        <p:spPr>
-          <a:xfrm>
-            <a:off x="8017968" y="684000"/>
-            <a:ext cx="3846984" cy="234000"/>
-          </a:xfrm>
-          <a:prstGeom prst="rect">
-            <a:avLst/>
-          </a:prstGeom>
-          <a:solidFill>
-            <a:srgbClr val="C00000"/>
-          </a:solidFill>
-          <a:ln>
+            <a:ln>
+              <a:noFill/>
+            </a:ln>
+          </p:spPr>
+          <p:style>
+            <a:lnRef idx="1">
+              <a:schemeClr val="accent1"/>
+            </a:lnRef>
+            <a:fillRef idx="3">
+              <a:schemeClr val="accent1"/>
+            </a:fillRef>
+            <a:effectRef idx="2">
+              <a:schemeClr val="accent1"/>
+            </a:effectRef>
+            <a:fontRef idx="minor">
+              <a:schemeClr val="lt1"/>
+            </a:fontRef>
+          </p:style>
+          <p:txBody>
+            <a:bodyPr rtlCol="0" anchor="ctr"/>
+            <a:lstStyle/>
+            <a:p>
+              <a:pPr algn="ctr"/>
+              <a:endParaRPr/>
+            </a:p>
+          </p:txBody>
+        </p:sp>
+        <p:sp>
+          <p:nvSpPr>
+            <p:cNvPr id="22" name="TextBox 21"/>
+            <p:cNvSpPr txBox="1"/>
+            <p:nvPr/>
+          </p:nvSpPr>
+          <p:spPr>
+            <a:xfrm>
+              <a:off x="4116984" y="2278800"/>
+              <a:ext cx="3810984" cy="223200"/>
+            </a:xfrm>
+            <a:prstGeom prst="rect">
+              <a:avLst/>
+            </a:prstGeom>
             <a:noFill/>
-          </a:ln>
-        </p:spPr>
-        <p:style>
-          <a:lnRef idx="1">
-            <a:schemeClr val="accent1"/>
-          </a:lnRef>
-          <a:fillRef idx="3">
-            <a:schemeClr val="accent1"/>
-          </a:fillRef>
-          <a:effectRef idx="2">
-            <a:schemeClr val="accent1"/>
-          </a:effectRef>
-          <a:fontRef idx="minor">
-            <a:schemeClr val="lt1"/>
-          </a:fontRef>
-        </p:style>
-        <p:txBody>
-          <a:bodyPr rtlCol="0" anchor="ctr"/>
-          <a:lstStyle/>
-          <a:p>
-            <a:pPr algn="ctr"/>
-          </a:p>
-        </p:txBody>
-      </p:sp>
-      <p:sp>
-        <p:nvSpPr>
-          <p:cNvPr id="26" name="TextBox 25"/>
-          <p:cNvSpPr txBox="1"/>
-          <p:nvPr/>
-        </p:nvSpPr>
-        <p:spPr>
-          <a:xfrm>
-            <a:off x="8035968" y="694800"/>
-            <a:ext cx="3810984" cy="223200"/>
-          </a:xfrm>
-          <a:prstGeom prst="rect">
-            <a:avLst/>
-          </a:prstGeom>
-          <a:noFill/>
-        </p:spPr>
-        <p:txBody>
-          <a:bodyPr wrap="square" lIns="50800" rIns="50800" tIns="25400" bIns="25400">
-            <a:spAutoFit/>
-          </a:bodyPr>
-          <a:lstStyle/>
-          <a:p>
-            <a:pPr algn="ctr"/>
-            <a:r>
-              <a:rPr sz="1000" b="1" i="0">
-                <a:solidFill>
-                  <a:srgbClr val="FFFFFF"/>
-                </a:solidFill>
-              </a:rPr>
-              <a:t>난제 ③</a:t>
-            </a:r>
-          </a:p>
-          <a:p>
-            <a:pPr algn="ctr"/>
-            <a:r>
-              <a:rPr sz="1000" b="1" i="0">
-                <a:solidFill>
-                  <a:srgbClr val="FFFFFF"/>
-                </a:solidFill>
-              </a:rPr>
-              <a:t>양산 시 균일도 미확보</a:t>
-            </a:r>
-          </a:p>
-        </p:txBody>
-      </p:sp>
-      <p:sp>
-        <p:nvSpPr>
-          <p:cNvPr id="27" name="Rectangle 26"/>
-          <p:cNvSpPr/>
-          <p:nvPr/>
-        </p:nvSpPr>
-        <p:spPr>
-          <a:xfrm>
-            <a:off x="8017968" y="928800"/>
-            <a:ext cx="3846984" cy="1044000"/>
-          </a:xfrm>
-          <a:prstGeom prst="rect">
-            <a:avLst/>
-          </a:prstGeom>
-          <a:solidFill>
-            <a:srgbClr val="FFCCCC"/>
-          </a:solidFill>
-          <a:ln w="6350">
+          </p:spPr>
+          <p:txBody>
+            <a:bodyPr wrap="square" lIns="50800" tIns="25400" rIns="50800" bIns="25400">
+              <a:spAutoFit/>
+            </a:bodyPr>
+            <a:lstStyle/>
+            <a:p>
+              <a:pPr algn="ctr"/>
+              <a:r>
+                <a:rPr sz="1000" b="1" i="0">
+                  <a:solidFill>
+                    <a:srgbClr val="FFFFFF"/>
+                  </a:solidFill>
+                </a:rPr>
+                <a:t>해결 ②</a:t>
+              </a:r>
+            </a:p>
+            <a:p>
+              <a:pPr algn="ctr"/>
+              <a:r>
+                <a:rPr sz="1000" b="1" i="0">
+                  <a:solidFill>
+                    <a:srgbClr val="FFFFFF"/>
+                  </a:solidFill>
+                </a:rPr>
+                <a:t>ALD 이중층 설계로 활성 차단</a:t>
+              </a:r>
+            </a:p>
+          </p:txBody>
+        </p:sp>
+        <p:sp>
+          <p:nvSpPr>
+            <p:cNvPr id="23" name="Rectangle 22"/>
+            <p:cNvSpPr/>
+            <p:nvPr/>
+          </p:nvSpPr>
+          <p:spPr>
+            <a:xfrm>
+              <a:off x="4098984" y="2520000"/>
+              <a:ext cx="3846984" cy="1260000"/>
+            </a:xfrm>
+            <a:prstGeom prst="rect">
+              <a:avLst/>
+            </a:prstGeom>
+            <a:solidFill>
+              <a:srgbClr val="E2EFDA"/>
+            </a:solidFill>
+            <a:ln w="6350">
+              <a:solidFill>
+                <a:srgbClr val="375623"/>
+              </a:solidFill>
+            </a:ln>
+          </p:spPr>
+          <p:style>
+            <a:lnRef idx="1">
+              <a:schemeClr val="accent1"/>
+            </a:lnRef>
+            <a:fillRef idx="3">
+              <a:schemeClr val="accent1"/>
+            </a:fillRef>
+            <a:effectRef idx="2">
+              <a:schemeClr val="accent1"/>
+            </a:effectRef>
+            <a:fontRef idx="minor">
+              <a:schemeClr val="lt1"/>
+            </a:fontRef>
+          </p:style>
+          <p:txBody>
+            <a:bodyPr rtlCol="0" anchor="ctr"/>
+            <a:lstStyle/>
+            <a:p>
+              <a:pPr algn="ctr"/>
+              <a:endParaRPr/>
+            </a:p>
+          </p:txBody>
+        </p:sp>
+        <p:sp>
+          <p:nvSpPr>
+            <p:cNvPr id="24" name="TextBox 23"/>
+            <p:cNvSpPr txBox="1"/>
+            <p:nvPr/>
+          </p:nvSpPr>
+          <p:spPr>
+            <a:xfrm>
+              <a:off x="4134983" y="2556000"/>
+              <a:ext cx="3774984" cy="1206000"/>
+            </a:xfrm>
+            <a:prstGeom prst="rect">
+              <a:avLst/>
+            </a:prstGeom>
+            <a:noFill/>
+          </p:spPr>
+          <p:txBody>
+            <a:bodyPr wrap="square" lIns="50800" tIns="25400" rIns="50800" bIns="25400">
+              <a:spAutoFit/>
+            </a:bodyPr>
+            <a:lstStyle/>
+            <a:p>
+              <a:pPr algn="l"/>
+              <a:r>
+                <a:rPr sz="950" b="0" i="0">
+                  <a:solidFill>
+                    <a:srgbClr val="404040"/>
+                  </a:solidFill>
+                </a:rPr>
+                <a:t>• ALD 자기제한: 1사이클 ≈ 0.5Å</a:t>
+              </a:r>
+            </a:p>
+            <a:p>
+              <a:pPr algn="l"/>
+              <a:r>
+                <a:rPr sz="950" b="0" i="0">
+                  <a:solidFill>
+                    <a:srgbClr val="404040"/>
+                  </a:solidFill>
+                </a:rPr>
+                <a:t>  → 1–2 nm (5–10사이클) 정밀 제어</a:t>
+              </a:r>
+            </a:p>
+            <a:p>
+              <a:pPr algn="l"/>
+              <a:r>
+                <a:rPr sz="950" b="0" i="0">
+                  <a:solidFill>
+                    <a:srgbClr val="404040"/>
+                  </a:solidFill>
+                </a:rPr>
+                <a:t>• 비정질(amorphous) VOₓ 선호</a:t>
+              </a:r>
+            </a:p>
+            <a:p>
+              <a:pPr algn="l"/>
+              <a:r>
+                <a:rPr sz="950" b="0" i="0">
+                  <a:solidFill>
+                    <a:srgbClr val="404040"/>
+                  </a:solidFill>
+                </a:rPr>
+                <a:t>• V₂O₅(내층)/TiO₂(외층) 이중층:</a:t>
+              </a:r>
+            </a:p>
+            <a:p>
+              <a:pPr algn="l"/>
+              <a:r>
+                <a:rPr sz="950" b="0" i="0">
+                  <a:solidFill>
+                    <a:srgbClr val="404040"/>
+                  </a:solidFill>
+                </a:rPr>
+                <a:t>  TiO₂ 외층이 전해질 직접 접촉 차단</a:t>
+              </a:r>
+            </a:p>
+            <a:p>
+              <a:pPr algn="l"/>
+              <a:r>
+                <a:rPr sz="950" b="0" i="0">
+                  <a:solidFill>
+                    <a:srgbClr val="404040"/>
+                  </a:solidFill>
+                </a:rPr>
+                <a:t>  Rct: 688 Ω → 202 Ω (1/3 수준)</a:t>
+              </a:r>
+            </a:p>
+          </p:txBody>
+        </p:sp>
+        <p:sp>
+          <p:nvSpPr>
+            <p:cNvPr id="25" name="Rectangle 24"/>
+            <p:cNvSpPr/>
+            <p:nvPr/>
+          </p:nvSpPr>
+          <p:spPr>
+            <a:xfrm>
+              <a:off x="8017968" y="684000"/>
+              <a:ext cx="3846984" cy="234000"/>
+            </a:xfrm>
+            <a:prstGeom prst="rect">
+              <a:avLst/>
+            </a:prstGeom>
             <a:solidFill>
               <a:srgbClr val="C00000"/>
             </a:solidFill>
-          </a:ln>
-        </p:spPr>
-        <p:style>
-          <a:lnRef idx="1">
-            <a:schemeClr val="accent1"/>
-          </a:lnRef>
-          <a:fillRef idx="3">
-            <a:schemeClr val="accent1"/>
-          </a:fillRef>
-          <a:effectRef idx="2">
-            <a:schemeClr val="accent1"/>
-          </a:effectRef>
-          <a:fontRef idx="minor">
-            <a:schemeClr val="lt1"/>
-          </a:fontRef>
-        </p:style>
-        <p:txBody>
-          <a:bodyPr rtlCol="0" anchor="ctr"/>
-          <a:lstStyle/>
-          <a:p>
-            <a:pPr algn="ctr"/>
-          </a:p>
-        </p:txBody>
-      </p:sp>
-      <p:sp>
-        <p:nvSpPr>
-          <p:cNvPr id="28" name="TextBox 27"/>
-          <p:cNvSpPr txBox="1"/>
-          <p:nvPr/>
-        </p:nvSpPr>
-        <p:spPr>
-          <a:xfrm>
-            <a:off x="8053968" y="954000"/>
-            <a:ext cx="3774984" cy="1007999"/>
-          </a:xfrm>
-          <a:prstGeom prst="rect">
-            <a:avLst/>
-          </a:prstGeom>
-          <a:noFill/>
-        </p:spPr>
-        <p:txBody>
-          <a:bodyPr wrap="square" lIns="50800" rIns="50800" tIns="25400" bIns="25400">
-            <a:spAutoFit/>
-          </a:bodyPr>
-          <a:lstStyle/>
-          <a:p>
-            <a:pPr algn="l"/>
-            <a:r>
-              <a:rPr sz="950" b="0" i="0">
-                <a:solidFill>
-                  <a:srgbClr val="404040"/>
-                </a:solidFill>
-              </a:rPr>
-              <a:t>• 처리량: g 수준 → 10 kg/h (×3,000배)</a:t>
-            </a:r>
-          </a:p>
-          <a:p>
-            <a:pPr algn="l"/>
-            <a:r>
-              <a:rPr sz="950" b="0" i="0">
-                <a:solidFill>
-                  <a:srgbClr val="404040"/>
-                </a:solidFill>
-              </a:rPr>
-              <a:t>• 분말 뭉침 → 미코팅 입자 발생</a:t>
-            </a:r>
-          </a:p>
-          <a:p>
-            <a:pPr algn="l"/>
-            <a:r>
-              <a:rPr sz="950" b="0" i="0">
-                <a:solidFill>
-                  <a:srgbClr val="404040"/>
-                </a:solidFill>
-              </a:rPr>
-              <a:t>• 정체구간(Dead Zone) → 과코팅 혼재</a:t>
-            </a:r>
-          </a:p>
-          <a:p>
-            <a:pPr algn="l"/>
-            <a:r>
-              <a:rPr sz="950" b="0" i="0">
-                <a:solidFill>
-                  <a:srgbClr val="404040"/>
-                </a:solidFill>
-              </a:rPr>
-              <a:t>  → GPC 편차 증가 → 품질 저하</a:t>
-            </a:r>
-          </a:p>
-        </p:txBody>
-      </p:sp>
-      <p:sp>
-        <p:nvSpPr>
-          <p:cNvPr id="29" name="Can 28"/>
-          <p:cNvSpPr/>
-          <p:nvPr/>
-        </p:nvSpPr>
-        <p:spPr>
-          <a:xfrm>
-            <a:off x="9842460" y="1998000"/>
-            <a:ext cx="198000" cy="252000"/>
-          </a:xfrm>
-          <a:prstGeom prst="can">
-            <a:avLst/>
-          </a:prstGeom>
-          <a:solidFill>
-            <a:srgbClr val="1F4E79"/>
-          </a:solidFill>
-          <a:ln>
+            <a:ln>
+              <a:noFill/>
+            </a:ln>
+          </p:spPr>
+          <p:style>
+            <a:lnRef idx="1">
+              <a:schemeClr val="accent1"/>
+            </a:lnRef>
+            <a:fillRef idx="3">
+              <a:schemeClr val="accent1"/>
+            </a:fillRef>
+            <a:effectRef idx="2">
+              <a:schemeClr val="accent1"/>
+            </a:effectRef>
+            <a:fontRef idx="minor">
+              <a:schemeClr val="lt1"/>
+            </a:fontRef>
+          </p:style>
+          <p:txBody>
+            <a:bodyPr rtlCol="0" anchor="ctr"/>
+            <a:lstStyle/>
+            <a:p>
+              <a:pPr algn="ctr"/>
+              <a:endParaRPr/>
+            </a:p>
+          </p:txBody>
+        </p:sp>
+        <p:sp>
+          <p:nvSpPr>
+            <p:cNvPr id="26" name="TextBox 25"/>
+            <p:cNvSpPr txBox="1"/>
+            <p:nvPr/>
+          </p:nvSpPr>
+          <p:spPr>
+            <a:xfrm>
+              <a:off x="8035968" y="694800"/>
+              <a:ext cx="3810984" cy="223200"/>
+            </a:xfrm>
+            <a:prstGeom prst="rect">
+              <a:avLst/>
+            </a:prstGeom>
             <a:noFill/>
-          </a:ln>
-        </p:spPr>
-        <p:style>
-          <a:lnRef idx="1">
-            <a:schemeClr val="accent1"/>
-          </a:lnRef>
-          <a:fillRef idx="3">
-            <a:schemeClr val="accent1"/>
-          </a:fillRef>
-          <a:effectRef idx="2">
-            <a:schemeClr val="accent1"/>
-          </a:effectRef>
-          <a:fontRef idx="minor">
-            <a:schemeClr val="lt1"/>
-          </a:fontRef>
-        </p:style>
-        <p:txBody>
-          <a:bodyPr rtlCol="0" anchor="ctr"/>
-          <a:lstStyle/>
-          <a:p>
-            <a:pPr algn="ctr"/>
-          </a:p>
-        </p:txBody>
-      </p:sp>
-      <p:sp>
-        <p:nvSpPr>
-          <p:cNvPr id="30" name="Rectangle 29"/>
-          <p:cNvSpPr/>
-          <p:nvPr/>
-        </p:nvSpPr>
-        <p:spPr>
-          <a:xfrm>
-            <a:off x="8017968" y="2268000"/>
-            <a:ext cx="3846984" cy="234000"/>
-          </a:xfrm>
-          <a:prstGeom prst="rect">
-            <a:avLst/>
-          </a:prstGeom>
-          <a:solidFill>
-            <a:srgbClr val="375623"/>
-          </a:solidFill>
-          <a:ln>
+          </p:spPr>
+          <p:txBody>
+            <a:bodyPr wrap="square" lIns="50800" tIns="25400" rIns="50800" bIns="25400">
+              <a:spAutoFit/>
+            </a:bodyPr>
+            <a:lstStyle/>
+            <a:p>
+              <a:pPr algn="ctr"/>
+              <a:r>
+                <a:rPr sz="1000" b="1" i="0">
+                  <a:solidFill>
+                    <a:srgbClr val="FFFFFF"/>
+                  </a:solidFill>
+                </a:rPr>
+                <a:t>난제 ③</a:t>
+              </a:r>
+            </a:p>
+            <a:p>
+              <a:pPr algn="ctr"/>
+              <a:r>
+                <a:rPr sz="1000" b="1" i="0">
+                  <a:solidFill>
+                    <a:srgbClr val="FFFFFF"/>
+                  </a:solidFill>
+                </a:rPr>
+                <a:t>양산 시 균일도 미확보</a:t>
+              </a:r>
+            </a:p>
+          </p:txBody>
+        </p:sp>
+        <p:sp>
+          <p:nvSpPr>
+            <p:cNvPr id="27" name="Rectangle 26"/>
+            <p:cNvSpPr/>
+            <p:nvPr/>
+          </p:nvSpPr>
+          <p:spPr>
+            <a:xfrm>
+              <a:off x="8017968" y="928800"/>
+              <a:ext cx="3846984" cy="1044000"/>
+            </a:xfrm>
+            <a:prstGeom prst="rect">
+              <a:avLst/>
+            </a:prstGeom>
+            <a:solidFill>
+              <a:srgbClr val="FFCCCC"/>
+            </a:solidFill>
+            <a:ln w="6350">
+              <a:solidFill>
+                <a:srgbClr val="C00000"/>
+              </a:solidFill>
+            </a:ln>
+          </p:spPr>
+          <p:style>
+            <a:lnRef idx="1">
+              <a:schemeClr val="accent1"/>
+            </a:lnRef>
+            <a:fillRef idx="3">
+              <a:schemeClr val="accent1"/>
+            </a:fillRef>
+            <a:effectRef idx="2">
+              <a:schemeClr val="accent1"/>
+            </a:effectRef>
+            <a:fontRef idx="minor">
+              <a:schemeClr val="lt1"/>
+            </a:fontRef>
+          </p:style>
+          <p:txBody>
+            <a:bodyPr rtlCol="0" anchor="ctr"/>
+            <a:lstStyle/>
+            <a:p>
+              <a:pPr algn="ctr"/>
+              <a:endParaRPr/>
+            </a:p>
+          </p:txBody>
+        </p:sp>
+        <p:sp>
+          <p:nvSpPr>
+            <p:cNvPr id="28" name="TextBox 27"/>
+            <p:cNvSpPr txBox="1"/>
+            <p:nvPr/>
+          </p:nvSpPr>
+          <p:spPr>
+            <a:xfrm>
+              <a:off x="8053968" y="954000"/>
+              <a:ext cx="3774984" cy="1007999"/>
+            </a:xfrm>
+            <a:prstGeom prst="rect">
+              <a:avLst/>
+            </a:prstGeom>
             <a:noFill/>
-          </a:ln>
-        </p:spPr>
-        <p:style>
-          <a:lnRef idx="1">
-            <a:schemeClr val="accent1"/>
-          </a:lnRef>
-          <a:fillRef idx="3">
-            <a:schemeClr val="accent1"/>
-          </a:fillRef>
-          <a:effectRef idx="2">
-            <a:schemeClr val="accent1"/>
-          </a:effectRef>
-          <a:fontRef idx="minor">
-            <a:schemeClr val="lt1"/>
-          </a:fontRef>
-        </p:style>
-        <p:txBody>
-          <a:bodyPr rtlCol="0" anchor="ctr"/>
-          <a:lstStyle/>
-          <a:p>
-            <a:pPr algn="ctr"/>
-          </a:p>
-        </p:txBody>
-      </p:sp>
-      <p:sp>
-        <p:nvSpPr>
-          <p:cNvPr id="31" name="TextBox 30"/>
-          <p:cNvSpPr txBox="1"/>
-          <p:nvPr/>
-        </p:nvSpPr>
-        <p:spPr>
-          <a:xfrm>
-            <a:off x="8035968" y="2278800"/>
-            <a:ext cx="3810984" cy="223200"/>
-          </a:xfrm>
-          <a:prstGeom prst="rect">
-            <a:avLst/>
-          </a:prstGeom>
-          <a:noFill/>
-        </p:spPr>
-        <p:txBody>
-          <a:bodyPr wrap="square" lIns="50800" rIns="50800" tIns="25400" bIns="25400">
-            <a:spAutoFit/>
-          </a:bodyPr>
-          <a:lstStyle/>
-          <a:p>
-            <a:pPr algn="ctr"/>
-            <a:r>
-              <a:rPr sz="1000" b="1" i="0">
-                <a:solidFill>
-                  <a:srgbClr val="FFFFFF"/>
-                </a:solidFill>
-              </a:rPr>
-              <a:t>해결 ③</a:t>
-            </a:r>
-          </a:p>
-          <a:p>
-            <a:pPr algn="ctr"/>
-            <a:r>
-              <a:rPr sz="1000" b="1" i="0">
-                <a:solidFill>
-                  <a:srgbClr val="FFFFFF"/>
-                </a:solidFill>
-              </a:rPr>
-              <a:t>3단계 스케일업 + 공압 이송</a:t>
-            </a:r>
-          </a:p>
-        </p:txBody>
-      </p:sp>
-      <p:sp>
-        <p:nvSpPr>
-          <p:cNvPr id="32" name="Rectangle 31"/>
-          <p:cNvSpPr/>
-          <p:nvPr/>
-        </p:nvSpPr>
-        <p:spPr>
-          <a:xfrm>
-            <a:off x="8017968" y="2520000"/>
-            <a:ext cx="3846984" cy="1260000"/>
-          </a:xfrm>
-          <a:prstGeom prst="rect">
-            <a:avLst/>
-          </a:prstGeom>
-          <a:solidFill>
-            <a:srgbClr val="E2EFDA"/>
-          </a:solidFill>
-          <a:ln w="6350">
+          </p:spPr>
+          <p:txBody>
+            <a:bodyPr wrap="square" lIns="50800" tIns="25400" rIns="50800" bIns="25400">
+              <a:spAutoFit/>
+            </a:bodyPr>
+            <a:lstStyle/>
+            <a:p>
+              <a:pPr algn="l"/>
+              <a:r>
+                <a:rPr sz="950" b="0" i="0">
+                  <a:solidFill>
+                    <a:srgbClr val="404040"/>
+                  </a:solidFill>
+                </a:rPr>
+                <a:t>• 처리량: g 수준 → 10 kg/h (×3,000배)</a:t>
+              </a:r>
+            </a:p>
+            <a:p>
+              <a:pPr algn="l"/>
+              <a:r>
+                <a:rPr sz="950" b="0" i="0">
+                  <a:solidFill>
+                    <a:srgbClr val="404040"/>
+                  </a:solidFill>
+                </a:rPr>
+                <a:t>• 분말 뭉침 → 미코팅 입자 발생</a:t>
+              </a:r>
+            </a:p>
+            <a:p>
+              <a:pPr algn="l"/>
+              <a:r>
+                <a:rPr sz="950" b="0" i="0">
+                  <a:solidFill>
+                    <a:srgbClr val="404040"/>
+                  </a:solidFill>
+                </a:rPr>
+                <a:t>• 정체구간(Dead Zone) → 과코팅 혼재</a:t>
+              </a:r>
+            </a:p>
+            <a:p>
+              <a:pPr algn="l"/>
+              <a:r>
+                <a:rPr sz="950" b="0" i="0">
+                  <a:solidFill>
+                    <a:srgbClr val="404040"/>
+                  </a:solidFill>
+                </a:rPr>
+                <a:t>  → GPC 편차 증가 → 품질 저하</a:t>
+              </a:r>
+            </a:p>
+          </p:txBody>
+        </p:sp>
+        <p:sp>
+          <p:nvSpPr>
+            <p:cNvPr id="29" name="Can 28"/>
+            <p:cNvSpPr/>
+            <p:nvPr/>
+          </p:nvSpPr>
+          <p:spPr>
+            <a:xfrm>
+              <a:off x="9842460" y="1998000"/>
+              <a:ext cx="198000" cy="252000"/>
+            </a:xfrm>
+            <a:prstGeom prst="can">
+              <a:avLst/>
+            </a:prstGeom>
+            <a:solidFill>
+              <a:srgbClr val="1F4E79"/>
+            </a:solidFill>
+            <a:ln>
+              <a:noFill/>
+            </a:ln>
+          </p:spPr>
+          <p:style>
+            <a:lnRef idx="1">
+              <a:schemeClr val="accent1"/>
+            </a:lnRef>
+            <a:fillRef idx="3">
+              <a:schemeClr val="accent1"/>
+            </a:fillRef>
+            <a:effectRef idx="2">
+              <a:schemeClr val="accent1"/>
+            </a:effectRef>
+            <a:fontRef idx="minor">
+              <a:schemeClr val="lt1"/>
+            </a:fontRef>
+          </p:style>
+          <p:txBody>
+            <a:bodyPr rtlCol="0" anchor="ctr"/>
+            <a:lstStyle/>
+            <a:p>
+              <a:pPr algn="ctr"/>
+              <a:endParaRPr/>
+            </a:p>
+          </p:txBody>
+        </p:sp>
+        <p:sp>
+          <p:nvSpPr>
+            <p:cNvPr id="30" name="Rectangle 29"/>
+            <p:cNvSpPr/>
+            <p:nvPr/>
+          </p:nvSpPr>
+          <p:spPr>
+            <a:xfrm>
+              <a:off x="8017968" y="2268000"/>
+              <a:ext cx="3846984" cy="234000"/>
+            </a:xfrm>
+            <a:prstGeom prst="rect">
+              <a:avLst/>
+            </a:prstGeom>
             <a:solidFill>
               <a:srgbClr val="375623"/>
             </a:solidFill>
-          </a:ln>
-        </p:spPr>
-        <p:style>
-          <a:lnRef idx="1">
-            <a:schemeClr val="accent1"/>
-          </a:lnRef>
-          <a:fillRef idx="3">
-            <a:schemeClr val="accent1"/>
-          </a:fillRef>
-          <a:effectRef idx="2">
-            <a:schemeClr val="accent1"/>
-          </a:effectRef>
-          <a:fontRef idx="minor">
-            <a:schemeClr val="lt1"/>
-          </a:fontRef>
-        </p:style>
-        <p:txBody>
-          <a:bodyPr rtlCol="0" anchor="ctr"/>
-          <a:lstStyle/>
-          <a:p>
-            <a:pPr algn="ctr"/>
-          </a:p>
-        </p:txBody>
-      </p:sp>
-      <p:sp>
-        <p:nvSpPr>
-          <p:cNvPr id="33" name="TextBox 32"/>
-          <p:cNvSpPr txBox="1"/>
-          <p:nvPr/>
-        </p:nvSpPr>
-        <p:spPr>
-          <a:xfrm>
-            <a:off x="8053968" y="2556000"/>
-            <a:ext cx="3774984" cy="1206000"/>
-          </a:xfrm>
-          <a:prstGeom prst="rect">
-            <a:avLst/>
-          </a:prstGeom>
-          <a:noFill/>
-        </p:spPr>
-        <p:txBody>
-          <a:bodyPr wrap="square" lIns="50800" rIns="50800" tIns="25400" bIns="25400">
-            <a:spAutoFit/>
-          </a:bodyPr>
-          <a:lstStyle/>
-          <a:p>
-            <a:pPr algn="l"/>
-            <a:r>
-              <a:rPr sz="950" b="0" i="0">
-                <a:solidFill>
-                  <a:srgbClr val="404040"/>
-                </a:solidFill>
-              </a:rPr>
-              <a:t>• 공압 이송: 기류로 분말 상시 분산</a:t>
-            </a:r>
-          </a:p>
-          <a:p>
-            <a:pPr algn="l"/>
-            <a:r>
-              <a:rPr sz="950" b="0" i="0">
-                <a:solidFill>
-                  <a:srgbClr val="404040"/>
-                </a:solidFill>
-              </a:rPr>
-              <a:t>  → 뭉침 방지</a:t>
-            </a:r>
-          </a:p>
-          <a:p>
-            <a:pPr algn="l"/>
-            <a:r>
-              <a:rPr sz="950" b="0" i="0">
-                <a:solidFill>
-                  <a:srgbClr val="404040"/>
-                </a:solidFill>
-              </a:rPr>
-              <a:t>• 구간 분리형 반응기: 교차 오염 방지</a:t>
-            </a:r>
-          </a:p>
-          <a:p>
-            <a:pPr algn="l"/>
-            <a:r>
-              <a:rPr sz="950" b="0" i="0">
-                <a:solidFill>
-                  <a:srgbClr val="404040"/>
-                </a:solidFill>
-              </a:rPr>
-              <a:t>• 3단계 스케일업:</a:t>
-            </a:r>
-          </a:p>
-          <a:p>
-            <a:pPr algn="l"/>
-            <a:r>
-              <a:rPr sz="950" b="0" i="0">
-                <a:solidFill>
-                  <a:srgbClr val="404040"/>
-                </a:solidFill>
-              </a:rPr>
-              <a:t>  FBR(≤10%) → OPERIO 10(≤7%)</a:t>
-            </a:r>
-          </a:p>
-          <a:p>
-            <a:pPr algn="l"/>
-            <a:r>
-              <a:rPr sz="950" b="0" i="0">
-                <a:solidFill>
-                  <a:srgbClr val="404040"/>
-                </a:solidFill>
-              </a:rPr>
-              <a:t>  → 양산(≤5% @ 10 kg/h)</a:t>
-            </a:r>
-          </a:p>
-        </p:txBody>
-      </p:sp>
-      <p:sp>
-        <p:nvSpPr>
-          <p:cNvPr id="34" name="Rectangle 33"/>
-          <p:cNvSpPr/>
-          <p:nvPr/>
-        </p:nvSpPr>
-        <p:spPr>
-          <a:xfrm>
-            <a:off x="180000" y="3798000"/>
-            <a:ext cx="1905492" cy="180000"/>
-          </a:xfrm>
-          <a:prstGeom prst="rect">
-            <a:avLst/>
-          </a:prstGeom>
-          <a:solidFill>
-            <a:srgbClr val="2E75B6"/>
-          </a:solidFill>
-          <a:ln>
+            <a:ln>
+              <a:noFill/>
+            </a:ln>
+          </p:spPr>
+          <p:style>
+            <a:lnRef idx="1">
+              <a:schemeClr val="accent1"/>
+            </a:lnRef>
+            <a:fillRef idx="3">
+              <a:schemeClr val="accent1"/>
+            </a:fillRef>
+            <a:effectRef idx="2">
+              <a:schemeClr val="accent1"/>
+            </a:effectRef>
+            <a:fontRef idx="minor">
+              <a:schemeClr val="lt1"/>
+            </a:fontRef>
+          </p:style>
+          <p:txBody>
+            <a:bodyPr rtlCol="0" anchor="ctr"/>
+            <a:lstStyle/>
+            <a:p>
+              <a:pPr algn="ctr"/>
+              <a:endParaRPr/>
+            </a:p>
+          </p:txBody>
+        </p:sp>
+        <p:sp>
+          <p:nvSpPr>
+            <p:cNvPr id="31" name="TextBox 30"/>
+            <p:cNvSpPr txBox="1"/>
+            <p:nvPr/>
+          </p:nvSpPr>
+          <p:spPr>
+            <a:xfrm>
+              <a:off x="8035968" y="2278800"/>
+              <a:ext cx="3810984" cy="223200"/>
+            </a:xfrm>
+            <a:prstGeom prst="rect">
+              <a:avLst/>
+            </a:prstGeom>
             <a:noFill/>
-          </a:ln>
-        </p:spPr>
-        <p:style>
-          <a:lnRef idx="1">
-            <a:schemeClr val="accent1"/>
-          </a:lnRef>
-          <a:fillRef idx="3">
-            <a:schemeClr val="accent1"/>
-          </a:fillRef>
-          <a:effectRef idx="2">
-            <a:schemeClr val="accent1"/>
-          </a:effectRef>
-          <a:fontRef idx="minor">
-            <a:schemeClr val="lt1"/>
-          </a:fontRef>
-        </p:style>
-        <p:txBody>
-          <a:bodyPr rtlCol="0" anchor="ctr"/>
-          <a:lstStyle/>
-          <a:p>
-            <a:pPr algn="ctr"/>
-          </a:p>
-        </p:txBody>
-      </p:sp>
-      <p:sp>
-        <p:nvSpPr>
-          <p:cNvPr id="35" name="TextBox 34"/>
-          <p:cNvSpPr txBox="1"/>
-          <p:nvPr/>
-        </p:nvSpPr>
-        <p:spPr>
-          <a:xfrm>
-            <a:off x="187200" y="3805200"/>
-            <a:ext cx="1887492" cy="165600"/>
-          </a:xfrm>
-          <a:prstGeom prst="rect">
-            <a:avLst/>
-          </a:prstGeom>
-          <a:noFill/>
-        </p:spPr>
-        <p:txBody>
-          <a:bodyPr wrap="square" lIns="50800" rIns="50800" tIns="25400" bIns="25400">
-            <a:spAutoFit/>
-          </a:bodyPr>
-          <a:lstStyle/>
-          <a:p>
-            <a:pPr algn="ctr"/>
-            <a:r>
-              <a:rPr sz="800" b="1" i="0">
-                <a:solidFill>
-                  <a:srgbClr val="FFFFFF"/>
-                </a:solidFill>
-              </a:rPr>
-              <a:t>기계연 + 대성기계</a:t>
-            </a:r>
-          </a:p>
-        </p:txBody>
-      </p:sp>
-      <p:sp>
-        <p:nvSpPr>
-          <p:cNvPr id="36" name="Rectangle 35"/>
-          <p:cNvSpPr/>
-          <p:nvPr/>
-        </p:nvSpPr>
-        <p:spPr>
-          <a:xfrm>
-            <a:off x="2121492" y="3798000"/>
-            <a:ext cx="1905492" cy="180000"/>
-          </a:xfrm>
-          <a:prstGeom prst="rect">
-            <a:avLst/>
-          </a:prstGeom>
-          <a:solidFill>
-            <a:srgbClr val="ED7D31"/>
-          </a:solidFill>
-          <a:ln>
+          </p:spPr>
+          <p:txBody>
+            <a:bodyPr wrap="square" lIns="50800" tIns="25400" rIns="50800" bIns="25400">
+              <a:spAutoFit/>
+            </a:bodyPr>
+            <a:lstStyle/>
+            <a:p>
+              <a:pPr algn="ctr"/>
+              <a:r>
+                <a:rPr sz="1000" b="1" i="0">
+                  <a:solidFill>
+                    <a:srgbClr val="FFFFFF"/>
+                  </a:solidFill>
+                </a:rPr>
+                <a:t>해결 ③</a:t>
+              </a:r>
+            </a:p>
+            <a:p>
+              <a:pPr algn="ctr"/>
+              <a:r>
+                <a:rPr sz="1000" b="1" i="0">
+                  <a:solidFill>
+                    <a:srgbClr val="FFFFFF"/>
+                  </a:solidFill>
+                </a:rPr>
+                <a:t>3단계 스케일업 + 공압 이송</a:t>
+              </a:r>
+            </a:p>
+          </p:txBody>
+        </p:sp>
+        <p:sp>
+          <p:nvSpPr>
+            <p:cNvPr id="32" name="Rectangle 31"/>
+            <p:cNvSpPr/>
+            <p:nvPr/>
+          </p:nvSpPr>
+          <p:spPr>
+            <a:xfrm>
+              <a:off x="8017968" y="2520000"/>
+              <a:ext cx="3846984" cy="1260000"/>
+            </a:xfrm>
+            <a:prstGeom prst="rect">
+              <a:avLst/>
+            </a:prstGeom>
+            <a:solidFill>
+              <a:srgbClr val="E2EFDA"/>
+            </a:solidFill>
+            <a:ln w="6350">
+              <a:solidFill>
+                <a:srgbClr val="375623"/>
+              </a:solidFill>
+            </a:ln>
+          </p:spPr>
+          <p:style>
+            <a:lnRef idx="1">
+              <a:schemeClr val="accent1"/>
+            </a:lnRef>
+            <a:fillRef idx="3">
+              <a:schemeClr val="accent1"/>
+            </a:fillRef>
+            <a:effectRef idx="2">
+              <a:schemeClr val="accent1"/>
+            </a:effectRef>
+            <a:fontRef idx="minor">
+              <a:schemeClr val="lt1"/>
+            </a:fontRef>
+          </p:style>
+          <p:txBody>
+            <a:bodyPr rtlCol="0" anchor="ctr"/>
+            <a:lstStyle/>
+            <a:p>
+              <a:pPr algn="ctr"/>
+              <a:endParaRPr/>
+            </a:p>
+          </p:txBody>
+        </p:sp>
+        <p:sp>
+          <p:nvSpPr>
+            <p:cNvPr id="33" name="TextBox 32"/>
+            <p:cNvSpPr txBox="1"/>
+            <p:nvPr/>
+          </p:nvSpPr>
+          <p:spPr>
+            <a:xfrm>
+              <a:off x="8053968" y="2556000"/>
+              <a:ext cx="3774984" cy="1206000"/>
+            </a:xfrm>
+            <a:prstGeom prst="rect">
+              <a:avLst/>
+            </a:prstGeom>
             <a:noFill/>
-          </a:ln>
-        </p:spPr>
-        <p:style>
-          <a:lnRef idx="1">
-            <a:schemeClr val="accent1"/>
-          </a:lnRef>
-          <a:fillRef idx="3">
-            <a:schemeClr val="accent1"/>
-          </a:fillRef>
-          <a:effectRef idx="2">
-            <a:schemeClr val="accent1"/>
-          </a:effectRef>
-          <a:fontRef idx="minor">
-            <a:schemeClr val="lt1"/>
-          </a:fontRef>
-        </p:style>
-        <p:txBody>
-          <a:bodyPr rtlCol="0" anchor="ctr"/>
-          <a:lstStyle/>
-          <a:p>
-            <a:pPr algn="ctr"/>
-          </a:p>
-        </p:txBody>
-      </p:sp>
-      <p:sp>
-        <p:nvSpPr>
-          <p:cNvPr id="37" name="TextBox 36"/>
-          <p:cNvSpPr txBox="1"/>
-          <p:nvPr/>
-        </p:nvSpPr>
-        <p:spPr>
-          <a:xfrm>
-            <a:off x="2128692" y="3805200"/>
-            <a:ext cx="1887492" cy="165600"/>
-          </a:xfrm>
-          <a:prstGeom prst="rect">
-            <a:avLst/>
-          </a:prstGeom>
-          <a:noFill/>
-        </p:spPr>
-        <p:txBody>
-          <a:bodyPr wrap="square" lIns="50800" rIns="50800" tIns="25400" bIns="25400">
-            <a:spAutoFit/>
-          </a:bodyPr>
-          <a:lstStyle/>
-          <a:p>
-            <a:pPr algn="ctr"/>
-            <a:r>
-              <a:rPr sz="800" b="1" i="0">
-                <a:solidFill>
-                  <a:srgbClr val="FFFFFF"/>
-                </a:solidFill>
-              </a:rPr>
-              <a:t>GPC 재현성 ≤5%</a:t>
-            </a:r>
-          </a:p>
-        </p:txBody>
-      </p:sp>
-      <p:sp>
-        <p:nvSpPr>
-          <p:cNvPr id="38" name="Rectangle 37"/>
-          <p:cNvSpPr/>
-          <p:nvPr/>
-        </p:nvSpPr>
-        <p:spPr>
-          <a:xfrm>
-            <a:off x="4098984" y="3798000"/>
-            <a:ext cx="1905492" cy="180000"/>
-          </a:xfrm>
-          <a:prstGeom prst="rect">
-            <a:avLst/>
-          </a:prstGeom>
-          <a:solidFill>
-            <a:srgbClr val="2E75B6"/>
-          </a:solidFill>
-          <a:ln>
+          </p:spPr>
+          <p:txBody>
+            <a:bodyPr wrap="square" lIns="50800" tIns="25400" rIns="50800" bIns="25400">
+              <a:spAutoFit/>
+            </a:bodyPr>
+            <a:lstStyle/>
+            <a:p>
+              <a:pPr algn="l"/>
+              <a:r>
+                <a:rPr sz="950" b="0" i="0">
+                  <a:solidFill>
+                    <a:srgbClr val="404040"/>
+                  </a:solidFill>
+                </a:rPr>
+                <a:t>• 공압 이송: 기류로 분말 상시 분산</a:t>
+              </a:r>
+            </a:p>
+            <a:p>
+              <a:pPr algn="l"/>
+              <a:r>
+                <a:rPr sz="950" b="0" i="0">
+                  <a:solidFill>
+                    <a:srgbClr val="404040"/>
+                  </a:solidFill>
+                </a:rPr>
+                <a:t>  → 뭉침 방지</a:t>
+              </a:r>
+            </a:p>
+            <a:p>
+              <a:pPr algn="l"/>
+              <a:r>
+                <a:rPr sz="950" b="0" i="0">
+                  <a:solidFill>
+                    <a:srgbClr val="404040"/>
+                  </a:solidFill>
+                </a:rPr>
+                <a:t>• 구간 분리형 반응기: 교차 오염 방지</a:t>
+              </a:r>
+            </a:p>
+            <a:p>
+              <a:pPr algn="l"/>
+              <a:r>
+                <a:rPr sz="950" b="0" i="0">
+                  <a:solidFill>
+                    <a:srgbClr val="404040"/>
+                  </a:solidFill>
+                </a:rPr>
+                <a:t>• 3단계 스케일업:</a:t>
+              </a:r>
+            </a:p>
+            <a:p>
+              <a:pPr algn="l"/>
+              <a:r>
+                <a:rPr sz="950" b="0" i="0">
+                  <a:solidFill>
+                    <a:srgbClr val="404040"/>
+                  </a:solidFill>
+                </a:rPr>
+                <a:t>  FBR(≤10%) → OPERIO 10(≤7%)</a:t>
+              </a:r>
+            </a:p>
+            <a:p>
+              <a:pPr algn="l"/>
+              <a:r>
+                <a:rPr sz="950" b="0" i="0">
+                  <a:solidFill>
+                    <a:srgbClr val="404040"/>
+                  </a:solidFill>
+                </a:rPr>
+                <a:t>  → 양산(≤5% @ 10 kg/h)</a:t>
+              </a:r>
+            </a:p>
+          </p:txBody>
+        </p:sp>
+        <p:sp>
+          <p:nvSpPr>
+            <p:cNvPr id="34" name="Rectangle 33"/>
+            <p:cNvSpPr/>
+            <p:nvPr/>
+          </p:nvSpPr>
+          <p:spPr>
+            <a:xfrm>
+              <a:off x="180000" y="3798000"/>
+              <a:ext cx="1905492" cy="180000"/>
+            </a:xfrm>
+            <a:prstGeom prst="rect">
+              <a:avLst/>
+            </a:prstGeom>
+            <a:solidFill>
+              <a:srgbClr val="2E75B6"/>
+            </a:solidFill>
+            <a:ln>
+              <a:noFill/>
+            </a:ln>
+          </p:spPr>
+          <p:style>
+            <a:lnRef idx="1">
+              <a:schemeClr val="accent1"/>
+            </a:lnRef>
+            <a:fillRef idx="3">
+              <a:schemeClr val="accent1"/>
+            </a:fillRef>
+            <a:effectRef idx="2">
+              <a:schemeClr val="accent1"/>
+            </a:effectRef>
+            <a:fontRef idx="minor">
+              <a:schemeClr val="lt1"/>
+            </a:fontRef>
+          </p:style>
+          <p:txBody>
+            <a:bodyPr rtlCol="0" anchor="ctr"/>
+            <a:lstStyle/>
+            <a:p>
+              <a:pPr algn="ctr"/>
+              <a:endParaRPr/>
+            </a:p>
+          </p:txBody>
+        </p:sp>
+        <p:sp>
+          <p:nvSpPr>
+            <p:cNvPr id="35" name="TextBox 34"/>
+            <p:cNvSpPr txBox="1"/>
+            <p:nvPr/>
+          </p:nvSpPr>
+          <p:spPr>
+            <a:xfrm>
+              <a:off x="187200" y="3805200"/>
+              <a:ext cx="1887492" cy="165600"/>
+            </a:xfrm>
+            <a:prstGeom prst="rect">
+              <a:avLst/>
+            </a:prstGeom>
             <a:noFill/>
-          </a:ln>
-        </p:spPr>
-        <p:style>
-          <a:lnRef idx="1">
-            <a:schemeClr val="accent1"/>
-          </a:lnRef>
-          <a:fillRef idx="3">
-            <a:schemeClr val="accent1"/>
-          </a:fillRef>
-          <a:effectRef idx="2">
-            <a:schemeClr val="accent1"/>
-          </a:effectRef>
-          <a:fontRef idx="minor">
-            <a:schemeClr val="lt1"/>
-          </a:fontRef>
-        </p:style>
-        <p:txBody>
-          <a:bodyPr rtlCol="0" anchor="ctr"/>
-          <a:lstStyle/>
-          <a:p>
-            <a:pPr algn="ctr"/>
-          </a:p>
-        </p:txBody>
-      </p:sp>
-      <p:sp>
-        <p:nvSpPr>
-          <p:cNvPr id="39" name="TextBox 38"/>
-          <p:cNvSpPr txBox="1"/>
-          <p:nvPr/>
-        </p:nvSpPr>
-        <p:spPr>
-          <a:xfrm>
-            <a:off x="4106183" y="3805200"/>
-            <a:ext cx="1887492" cy="165600"/>
-          </a:xfrm>
-          <a:prstGeom prst="rect">
-            <a:avLst/>
-          </a:prstGeom>
-          <a:noFill/>
-        </p:spPr>
-        <p:txBody>
-          <a:bodyPr wrap="square" lIns="50800" rIns="50800" tIns="25400" bIns="25400">
-            <a:spAutoFit/>
-          </a:bodyPr>
-          <a:lstStyle/>
-          <a:p>
-            <a:pPr algn="ctr"/>
-            <a:r>
-              <a:rPr sz="800" b="1" i="0">
-                <a:solidFill>
-                  <a:srgbClr val="FFFFFF"/>
-                </a:solidFill>
-              </a:rPr>
-              <a:t>기계연 (KIMM)</a:t>
-            </a:r>
-          </a:p>
-        </p:txBody>
-      </p:sp>
-      <p:sp>
-        <p:nvSpPr>
-          <p:cNvPr id="40" name="Rectangle 39"/>
-          <p:cNvSpPr/>
-          <p:nvPr/>
-        </p:nvSpPr>
-        <p:spPr>
-          <a:xfrm>
-            <a:off x="6040476" y="3798000"/>
-            <a:ext cx="1905492" cy="180000"/>
-          </a:xfrm>
-          <a:prstGeom prst="rect">
-            <a:avLst/>
-          </a:prstGeom>
-          <a:solidFill>
-            <a:srgbClr val="ED7D31"/>
-          </a:solidFill>
-          <a:ln>
+          </p:spPr>
+          <p:txBody>
+            <a:bodyPr wrap="square" lIns="50800" tIns="25400" rIns="50800" bIns="25400">
+              <a:spAutoFit/>
+            </a:bodyPr>
+            <a:lstStyle/>
+            <a:p>
+              <a:pPr algn="ctr"/>
+              <a:r>
+                <a:rPr sz="800" b="1" i="0">
+                  <a:solidFill>
+                    <a:srgbClr val="FFFFFF"/>
+                  </a:solidFill>
+                </a:rPr>
+                <a:t>기계연 + 대성기계</a:t>
+              </a:r>
+            </a:p>
+          </p:txBody>
+        </p:sp>
+        <p:sp>
+          <p:nvSpPr>
+            <p:cNvPr id="36" name="Rectangle 35"/>
+            <p:cNvSpPr/>
+            <p:nvPr/>
+          </p:nvSpPr>
+          <p:spPr>
+            <a:xfrm>
+              <a:off x="2121492" y="3798000"/>
+              <a:ext cx="1905492" cy="180000"/>
+            </a:xfrm>
+            <a:prstGeom prst="rect">
+              <a:avLst/>
+            </a:prstGeom>
+            <a:solidFill>
+              <a:srgbClr val="ED7D31"/>
+            </a:solidFill>
+            <a:ln>
+              <a:noFill/>
+            </a:ln>
+          </p:spPr>
+          <p:style>
+            <a:lnRef idx="1">
+              <a:schemeClr val="accent1"/>
+            </a:lnRef>
+            <a:fillRef idx="3">
+              <a:schemeClr val="accent1"/>
+            </a:fillRef>
+            <a:effectRef idx="2">
+              <a:schemeClr val="accent1"/>
+            </a:effectRef>
+            <a:fontRef idx="minor">
+              <a:schemeClr val="lt1"/>
+            </a:fontRef>
+          </p:style>
+          <p:txBody>
+            <a:bodyPr rtlCol="0" anchor="ctr"/>
+            <a:lstStyle/>
+            <a:p>
+              <a:pPr algn="ctr"/>
+              <a:endParaRPr/>
+            </a:p>
+          </p:txBody>
+        </p:sp>
+        <p:sp>
+          <p:nvSpPr>
+            <p:cNvPr id="37" name="TextBox 36"/>
+            <p:cNvSpPr txBox="1"/>
+            <p:nvPr/>
+          </p:nvSpPr>
+          <p:spPr>
+            <a:xfrm>
+              <a:off x="2128692" y="3805200"/>
+              <a:ext cx="1887492" cy="165600"/>
+            </a:xfrm>
+            <a:prstGeom prst="rect">
+              <a:avLst/>
+            </a:prstGeom>
             <a:noFill/>
-          </a:ln>
-        </p:spPr>
-        <p:style>
-          <a:lnRef idx="1">
-            <a:schemeClr val="accent1"/>
-          </a:lnRef>
-          <a:fillRef idx="3">
-            <a:schemeClr val="accent1"/>
-          </a:fillRef>
-          <a:effectRef idx="2">
-            <a:schemeClr val="accent1"/>
-          </a:effectRef>
-          <a:fontRef idx="minor">
-            <a:schemeClr val="lt1"/>
-          </a:fontRef>
-        </p:style>
-        <p:txBody>
-          <a:bodyPr rtlCol="0" anchor="ctr"/>
-          <a:lstStyle/>
-          <a:p>
-            <a:pPr algn="ctr"/>
-          </a:p>
-        </p:txBody>
-      </p:sp>
-      <p:sp>
-        <p:nvSpPr>
-          <p:cNvPr id="41" name="TextBox 40"/>
-          <p:cNvSpPr txBox="1"/>
-          <p:nvPr/>
-        </p:nvSpPr>
-        <p:spPr>
-          <a:xfrm>
-            <a:off x="6047676" y="3805200"/>
-            <a:ext cx="1887492" cy="165600"/>
-          </a:xfrm>
-          <a:prstGeom prst="rect">
-            <a:avLst/>
-          </a:prstGeom>
-          <a:noFill/>
-        </p:spPr>
-        <p:txBody>
-          <a:bodyPr wrap="square" lIns="50800" rIns="50800" tIns="25400" bIns="25400">
-            <a:spAutoFit/>
-          </a:bodyPr>
-          <a:lstStyle/>
-          <a:p>
-            <a:pPr algn="ctr"/>
-            <a:r>
-              <a:rPr sz="800" b="1" i="0">
-                <a:solidFill>
-                  <a:srgbClr val="FFFFFF"/>
-                </a:solidFill>
-              </a:rPr>
-              <a:t>계면저항 ≤50 Ω·cm²</a:t>
-            </a:r>
-          </a:p>
-        </p:txBody>
-      </p:sp>
-      <p:sp>
-        <p:nvSpPr>
-          <p:cNvPr id="42" name="Rectangle 41"/>
-          <p:cNvSpPr/>
-          <p:nvPr/>
-        </p:nvSpPr>
-        <p:spPr>
-          <a:xfrm>
-            <a:off x="8017968" y="3798000"/>
-            <a:ext cx="1905492" cy="180000"/>
-          </a:xfrm>
-          <a:prstGeom prst="rect">
-            <a:avLst/>
-          </a:prstGeom>
-          <a:solidFill>
-            <a:srgbClr val="2E75B6"/>
-          </a:solidFill>
-          <a:ln>
+          </p:spPr>
+          <p:txBody>
+            <a:bodyPr wrap="square" lIns="50800" tIns="25400" rIns="50800" bIns="25400">
+              <a:spAutoFit/>
+            </a:bodyPr>
+            <a:lstStyle/>
+            <a:p>
+              <a:pPr algn="ctr"/>
+              <a:r>
+                <a:rPr sz="800" b="1" i="0">
+                  <a:solidFill>
+                    <a:srgbClr val="FFFFFF"/>
+                  </a:solidFill>
+                </a:rPr>
+                <a:t>GPC 재현성 ≤5%</a:t>
+              </a:r>
+            </a:p>
+          </p:txBody>
+        </p:sp>
+        <p:sp>
+          <p:nvSpPr>
+            <p:cNvPr id="38" name="Rectangle 37"/>
+            <p:cNvSpPr/>
+            <p:nvPr/>
+          </p:nvSpPr>
+          <p:spPr>
+            <a:xfrm>
+              <a:off x="4098984" y="3798000"/>
+              <a:ext cx="1905492" cy="180000"/>
+            </a:xfrm>
+            <a:prstGeom prst="rect">
+              <a:avLst/>
+            </a:prstGeom>
+            <a:solidFill>
+              <a:srgbClr val="2E75B6"/>
+            </a:solidFill>
+            <a:ln>
+              <a:noFill/>
+            </a:ln>
+          </p:spPr>
+          <p:style>
+            <a:lnRef idx="1">
+              <a:schemeClr val="accent1"/>
+            </a:lnRef>
+            <a:fillRef idx="3">
+              <a:schemeClr val="accent1"/>
+            </a:fillRef>
+            <a:effectRef idx="2">
+              <a:schemeClr val="accent1"/>
+            </a:effectRef>
+            <a:fontRef idx="minor">
+              <a:schemeClr val="lt1"/>
+            </a:fontRef>
+          </p:style>
+          <p:txBody>
+            <a:bodyPr rtlCol="0" anchor="ctr"/>
+            <a:lstStyle/>
+            <a:p>
+              <a:pPr algn="ctr"/>
+              <a:endParaRPr/>
+            </a:p>
+          </p:txBody>
+        </p:sp>
+        <p:sp>
+          <p:nvSpPr>
+            <p:cNvPr id="39" name="TextBox 38"/>
+            <p:cNvSpPr txBox="1"/>
+            <p:nvPr/>
+          </p:nvSpPr>
+          <p:spPr>
+            <a:xfrm>
+              <a:off x="4106183" y="3805200"/>
+              <a:ext cx="1887492" cy="165600"/>
+            </a:xfrm>
+            <a:prstGeom prst="rect">
+              <a:avLst/>
+            </a:prstGeom>
             <a:noFill/>
-          </a:ln>
-        </p:spPr>
-        <p:style>
-          <a:lnRef idx="1">
-            <a:schemeClr val="accent1"/>
-          </a:lnRef>
-          <a:fillRef idx="3">
-            <a:schemeClr val="accent1"/>
-          </a:fillRef>
-          <a:effectRef idx="2">
-            <a:schemeClr val="accent1"/>
-          </a:effectRef>
-          <a:fontRef idx="minor">
-            <a:schemeClr val="lt1"/>
-          </a:fontRef>
-        </p:style>
-        <p:txBody>
-          <a:bodyPr rtlCol="0" anchor="ctr"/>
-          <a:lstStyle/>
-          <a:p>
-            <a:pPr algn="ctr"/>
-          </a:p>
-        </p:txBody>
-      </p:sp>
-      <p:sp>
-        <p:nvSpPr>
-          <p:cNvPr id="43" name="TextBox 42"/>
-          <p:cNvSpPr txBox="1"/>
-          <p:nvPr/>
-        </p:nvSpPr>
-        <p:spPr>
-          <a:xfrm>
-            <a:off x="8025168" y="3805200"/>
-            <a:ext cx="1887492" cy="165600"/>
-          </a:xfrm>
-          <a:prstGeom prst="rect">
-            <a:avLst/>
-          </a:prstGeom>
-          <a:noFill/>
-        </p:spPr>
-        <p:txBody>
-          <a:bodyPr wrap="square" lIns="50800" rIns="50800" tIns="25400" bIns="25400">
-            <a:spAutoFit/>
-          </a:bodyPr>
-          <a:lstStyle/>
-          <a:p>
-            <a:pPr algn="ctr"/>
-            <a:r>
-              <a:rPr sz="800" b="1" i="0">
-                <a:solidFill>
-                  <a:srgbClr val="FFFFFF"/>
-                </a:solidFill>
-              </a:rPr>
-              <a:t>대성기계 (OPERIO 10)</a:t>
-            </a:r>
-          </a:p>
-        </p:txBody>
-      </p:sp>
-      <p:sp>
-        <p:nvSpPr>
-          <p:cNvPr id="44" name="Rectangle 43"/>
-          <p:cNvSpPr/>
-          <p:nvPr/>
-        </p:nvSpPr>
-        <p:spPr>
-          <a:xfrm>
-            <a:off x="9959460" y="3798000"/>
-            <a:ext cx="1905492" cy="180000"/>
-          </a:xfrm>
-          <a:prstGeom prst="rect">
-            <a:avLst/>
-          </a:prstGeom>
-          <a:solidFill>
-            <a:srgbClr val="ED7D31"/>
-          </a:solidFill>
-          <a:ln>
+          </p:spPr>
+          <p:txBody>
+            <a:bodyPr wrap="square" lIns="50800" tIns="25400" rIns="50800" bIns="25400">
+              <a:spAutoFit/>
+            </a:bodyPr>
+            <a:lstStyle/>
+            <a:p>
+              <a:pPr algn="ctr"/>
+              <a:r>
+                <a:rPr sz="800" b="1" i="0">
+                  <a:solidFill>
+                    <a:srgbClr val="FFFFFF"/>
+                  </a:solidFill>
+                </a:rPr>
+                <a:t>기계연 (KIMM)</a:t>
+              </a:r>
+            </a:p>
+          </p:txBody>
+        </p:sp>
+        <p:sp>
+          <p:nvSpPr>
+            <p:cNvPr id="40" name="Rectangle 39"/>
+            <p:cNvSpPr/>
+            <p:nvPr/>
+          </p:nvSpPr>
+          <p:spPr>
+            <a:xfrm>
+              <a:off x="6040476" y="3798000"/>
+              <a:ext cx="1905492" cy="180000"/>
+            </a:xfrm>
+            <a:prstGeom prst="rect">
+              <a:avLst/>
+            </a:prstGeom>
+            <a:solidFill>
+              <a:srgbClr val="ED7D31"/>
+            </a:solidFill>
+            <a:ln>
+              <a:noFill/>
+            </a:ln>
+          </p:spPr>
+          <p:style>
+            <a:lnRef idx="1">
+              <a:schemeClr val="accent1"/>
+            </a:lnRef>
+            <a:fillRef idx="3">
+              <a:schemeClr val="accent1"/>
+            </a:fillRef>
+            <a:effectRef idx="2">
+              <a:schemeClr val="accent1"/>
+            </a:effectRef>
+            <a:fontRef idx="minor">
+              <a:schemeClr val="lt1"/>
+            </a:fontRef>
+          </p:style>
+          <p:txBody>
+            <a:bodyPr rtlCol="0" anchor="ctr"/>
+            <a:lstStyle/>
+            <a:p>
+              <a:pPr algn="ctr"/>
+              <a:endParaRPr/>
+            </a:p>
+          </p:txBody>
+        </p:sp>
+        <p:sp>
+          <p:nvSpPr>
+            <p:cNvPr id="41" name="TextBox 40"/>
+            <p:cNvSpPr txBox="1"/>
+            <p:nvPr/>
+          </p:nvSpPr>
+          <p:spPr>
+            <a:xfrm>
+              <a:off x="6047676" y="3805200"/>
+              <a:ext cx="1887492" cy="165600"/>
+            </a:xfrm>
+            <a:prstGeom prst="rect">
+              <a:avLst/>
+            </a:prstGeom>
             <a:noFill/>
-          </a:ln>
-        </p:spPr>
-        <p:style>
-          <a:lnRef idx="1">
-            <a:schemeClr val="accent1"/>
-          </a:lnRef>
-          <a:fillRef idx="3">
-            <a:schemeClr val="accent1"/>
-          </a:fillRef>
-          <a:effectRef idx="2">
-            <a:schemeClr val="accent1"/>
-          </a:effectRef>
-          <a:fontRef idx="minor">
-            <a:schemeClr val="lt1"/>
-          </a:fontRef>
-        </p:style>
-        <p:txBody>
-          <a:bodyPr rtlCol="0" anchor="ctr"/>
-          <a:lstStyle/>
-          <a:p>
-            <a:pPr algn="ctr"/>
-          </a:p>
-        </p:txBody>
-      </p:sp>
-      <p:sp>
-        <p:nvSpPr>
-          <p:cNvPr id="45" name="TextBox 44"/>
-          <p:cNvSpPr txBox="1"/>
-          <p:nvPr/>
-        </p:nvSpPr>
-        <p:spPr>
-          <a:xfrm>
-            <a:off x="9966660" y="3805200"/>
-            <a:ext cx="1887492" cy="165600"/>
-          </a:xfrm>
-          <a:prstGeom prst="rect">
-            <a:avLst/>
-          </a:prstGeom>
-          <a:noFill/>
-        </p:spPr>
-        <p:txBody>
-          <a:bodyPr wrap="square" lIns="50800" rIns="50800" tIns="25400" bIns="25400">
-            <a:spAutoFit/>
-          </a:bodyPr>
-          <a:lstStyle/>
-          <a:p>
-            <a:pPr algn="ctr"/>
-            <a:r>
-              <a:rPr sz="800" b="1" i="0">
-                <a:solidFill>
-                  <a:srgbClr val="FFFFFF"/>
-                </a:solidFill>
-              </a:rPr>
-              <a:t>두께 편차 ≤5%</a:t>
-            </a:r>
-          </a:p>
-        </p:txBody>
-      </p:sp>
+          </p:spPr>
+          <p:txBody>
+            <a:bodyPr wrap="square" lIns="50800" tIns="25400" rIns="50800" bIns="25400">
+              <a:spAutoFit/>
+            </a:bodyPr>
+            <a:lstStyle/>
+            <a:p>
+              <a:pPr algn="ctr"/>
+              <a:r>
+                <a:rPr sz="800" b="1" i="0">
+                  <a:solidFill>
+                    <a:srgbClr val="FFFFFF"/>
+                  </a:solidFill>
+                </a:rPr>
+                <a:t>계면저항 ≤50 Ω·cm²</a:t>
+              </a:r>
+            </a:p>
+          </p:txBody>
+        </p:sp>
+        <p:sp>
+          <p:nvSpPr>
+            <p:cNvPr id="42" name="Rectangle 41"/>
+            <p:cNvSpPr/>
+            <p:nvPr/>
+          </p:nvSpPr>
+          <p:spPr>
+            <a:xfrm>
+              <a:off x="8017968" y="3798000"/>
+              <a:ext cx="1905492" cy="180000"/>
+            </a:xfrm>
+            <a:prstGeom prst="rect">
+              <a:avLst/>
+            </a:prstGeom>
+            <a:solidFill>
+              <a:srgbClr val="2E75B6"/>
+            </a:solidFill>
+            <a:ln>
+              <a:noFill/>
+            </a:ln>
+          </p:spPr>
+          <p:style>
+            <a:lnRef idx="1">
+              <a:schemeClr val="accent1"/>
+            </a:lnRef>
+            <a:fillRef idx="3">
+              <a:schemeClr val="accent1"/>
+            </a:fillRef>
+            <a:effectRef idx="2">
+              <a:schemeClr val="accent1"/>
+            </a:effectRef>
+            <a:fontRef idx="minor">
+              <a:schemeClr val="lt1"/>
+            </a:fontRef>
+          </p:style>
+          <p:txBody>
+            <a:bodyPr rtlCol="0" anchor="ctr"/>
+            <a:lstStyle/>
+            <a:p>
+              <a:pPr algn="ctr"/>
+              <a:endParaRPr/>
+            </a:p>
+          </p:txBody>
+        </p:sp>
+        <p:sp>
+          <p:nvSpPr>
+            <p:cNvPr id="43" name="TextBox 42"/>
+            <p:cNvSpPr txBox="1"/>
+            <p:nvPr/>
+          </p:nvSpPr>
+          <p:spPr>
+            <a:xfrm>
+              <a:off x="8025168" y="3805200"/>
+              <a:ext cx="1887492" cy="165600"/>
+            </a:xfrm>
+            <a:prstGeom prst="rect">
+              <a:avLst/>
+            </a:prstGeom>
+            <a:noFill/>
+          </p:spPr>
+          <p:txBody>
+            <a:bodyPr wrap="square" lIns="50800" tIns="25400" rIns="50800" bIns="25400">
+              <a:spAutoFit/>
+            </a:bodyPr>
+            <a:lstStyle/>
+            <a:p>
+              <a:pPr algn="ctr"/>
+              <a:r>
+                <a:rPr sz="800" b="1" i="0">
+                  <a:solidFill>
+                    <a:srgbClr val="FFFFFF"/>
+                  </a:solidFill>
+                </a:rPr>
+                <a:t>대성기계 (OPERIO 10)</a:t>
+              </a:r>
+            </a:p>
+          </p:txBody>
+        </p:sp>
+        <p:sp>
+          <p:nvSpPr>
+            <p:cNvPr id="44" name="Rectangle 43"/>
+            <p:cNvSpPr/>
+            <p:nvPr/>
+          </p:nvSpPr>
+          <p:spPr>
+            <a:xfrm>
+              <a:off x="9959460" y="3798000"/>
+              <a:ext cx="1905492" cy="180000"/>
+            </a:xfrm>
+            <a:prstGeom prst="rect">
+              <a:avLst/>
+            </a:prstGeom>
+            <a:solidFill>
+              <a:srgbClr val="ED7D31"/>
+            </a:solidFill>
+            <a:ln>
+              <a:noFill/>
+            </a:ln>
+          </p:spPr>
+          <p:style>
+            <a:lnRef idx="1">
+              <a:schemeClr val="accent1"/>
+            </a:lnRef>
+            <a:fillRef idx="3">
+              <a:schemeClr val="accent1"/>
+            </a:fillRef>
+            <a:effectRef idx="2">
+              <a:schemeClr val="accent1"/>
+            </a:effectRef>
+            <a:fontRef idx="minor">
+              <a:schemeClr val="lt1"/>
+            </a:fontRef>
+          </p:style>
+          <p:txBody>
+            <a:bodyPr rtlCol="0" anchor="ctr"/>
+            <a:lstStyle/>
+            <a:p>
+              <a:pPr algn="ctr"/>
+              <a:endParaRPr/>
+            </a:p>
+          </p:txBody>
+        </p:sp>
+        <p:sp>
+          <p:nvSpPr>
+            <p:cNvPr id="45" name="TextBox 44"/>
+            <p:cNvSpPr txBox="1"/>
+            <p:nvPr/>
+          </p:nvSpPr>
+          <p:spPr>
+            <a:xfrm>
+              <a:off x="9966660" y="3805200"/>
+              <a:ext cx="1887492" cy="165600"/>
+            </a:xfrm>
+            <a:prstGeom prst="rect">
+              <a:avLst/>
+            </a:prstGeom>
+            <a:noFill/>
+          </p:spPr>
+          <p:txBody>
+            <a:bodyPr wrap="square" lIns="50800" tIns="25400" rIns="50800" bIns="25400">
+              <a:spAutoFit/>
+            </a:bodyPr>
+            <a:lstStyle/>
+            <a:p>
+              <a:pPr algn="ctr"/>
+              <a:r>
+                <a:rPr sz="800" b="1" i="0">
+                  <a:solidFill>
+                    <a:srgbClr val="FFFFFF"/>
+                  </a:solidFill>
+                </a:rPr>
+                <a:t>두께 편차 ≤5%</a:t>
+              </a:r>
+            </a:p>
+          </p:txBody>
+        </p:sp>
+      </p:grpSp>
     </p:spTree>
   </p:cSld>
   <p:clrMapOvr>
@@ -6592,7 +6729,7 @@
 </file>
 
 <file path=ppt/slides/slide4.xml><?xml version="1.0" encoding="utf-8"?>
-<p:sld xmlns:a="http://schemas.openxmlformats.org/drawingml/2006/main" xmlns:p="http://schemas.openxmlformats.org/presentationml/2006/main" xmlns:r="http://schemas.openxmlformats.org/officeDocument/2006/relationships">
+<p:sld xmlns:a="http://schemas.openxmlformats.org/drawingml/2006/main" xmlns:r="http://schemas.openxmlformats.org/officeDocument/2006/relationships" xmlns:p="http://schemas.openxmlformats.org/presentationml/2006/main">
   <p:cSld>
     <p:spTree>
       <p:nvGrpSpPr>
@@ -6600,7 +6737,14 @@
         <p:cNvGrpSpPr/>
         <p:nvPr/>
       </p:nvGrpSpPr>
-      <p:grpSpPr/>
+      <p:grpSpPr>
+        <a:xfrm>
+          <a:off x="0" y="0"/>
+          <a:ext cx="0" cy="0"/>
+          <a:chOff x="0" y="0"/>
+          <a:chExt cx="0" cy="0"/>
+        </a:xfrm>
+      </p:grpSpPr>
       <p:sp>
         <p:nvSpPr>
           <p:cNvPr id="2" name="Rectangle 1"/>
@@ -6641,6 +6785,7 @@
           <a:lstStyle/>
           <a:p>
             <a:pPr algn="ctr"/>
+            <a:endParaRPr/>
           </a:p>
         </p:txBody>
       </p:sp>
@@ -6684,6 +6829,7 @@
           <a:lstStyle/>
           <a:p>
             <a:pPr algn="ctr"/>
+            <a:endParaRPr/>
           </a:p>
         </p:txBody>
       </p:sp>
@@ -6727,6 +6873,7 @@
           <a:lstStyle/>
           <a:p>
             <a:pPr algn="ctr"/>
+            <a:endParaRPr/>
           </a:p>
         </p:txBody>
       </p:sp>
@@ -6747,7 +6894,7 @@
           <a:noFill/>
         </p:spPr>
         <p:txBody>
-          <a:bodyPr wrap="square" lIns="50800" rIns="50800" tIns="25400" bIns="25400">
+          <a:bodyPr wrap="square" lIns="50800" tIns="25400" rIns="50800" bIns="25400">
             <a:spAutoFit/>
           </a:bodyPr>
           <a:lstStyle/>
@@ -6781,7 +6928,7 @@
           <a:noFill/>
         </p:spPr>
         <p:txBody>
-          <a:bodyPr wrap="square" lIns="50800" rIns="50800" tIns="25400" bIns="25400">
+          <a:bodyPr wrap="square" lIns="50800" tIns="25400" rIns="50800" bIns="25400">
             <a:spAutoFit/>
           </a:bodyPr>
           <a:lstStyle/>
@@ -6886,6 +7033,7 @@
           <a:lstStyle/>
           <a:p>
             <a:pPr algn="ctr"/>
+            <a:endParaRPr/>
           </a:p>
         </p:txBody>
       </p:sp>
@@ -6906,7 +7054,7 @@
           <a:noFill/>
         </p:spPr>
         <p:txBody>
-          <a:bodyPr wrap="square" lIns="50800" rIns="50800" tIns="25400" bIns="25400">
+          <a:bodyPr wrap="square" lIns="50800" tIns="25400" rIns="50800" bIns="25400">
             <a:spAutoFit/>
           </a:bodyPr>
           <a:lstStyle/>
@@ -6932,7 +7080,7 @@
 </file>
 
 <file path=ppt/slides/slide5.xml><?xml version="1.0" encoding="utf-8"?>
-<p:sld xmlns:a="http://schemas.openxmlformats.org/drawingml/2006/main" xmlns:p="http://schemas.openxmlformats.org/presentationml/2006/main" xmlns:r="http://schemas.openxmlformats.org/officeDocument/2006/relationships">
+<p:sld xmlns:a="http://schemas.openxmlformats.org/drawingml/2006/main" xmlns:r="http://schemas.openxmlformats.org/officeDocument/2006/relationships" xmlns:p="http://schemas.openxmlformats.org/presentationml/2006/main">
   <p:cSld>
     <p:spTree>
       <p:nvGrpSpPr>
@@ -6940,7 +7088,14 @@
         <p:cNvGrpSpPr/>
         <p:nvPr/>
       </p:nvGrpSpPr>
-      <p:grpSpPr/>
+      <p:grpSpPr>
+        <a:xfrm>
+          <a:off x="0" y="0"/>
+          <a:ext cx="0" cy="0"/>
+          <a:chOff x="0" y="0"/>
+          <a:chExt cx="0" cy="0"/>
+        </a:xfrm>
+      </p:grpSpPr>
       <p:sp>
         <p:nvSpPr>
           <p:cNvPr id="2" name="Rectangle 1"/>
@@ -6981,6 +7136,7 @@
           <a:lstStyle/>
           <a:p>
             <a:pPr algn="ctr"/>
+            <a:endParaRPr/>
           </a:p>
         </p:txBody>
       </p:sp>
@@ -7024,6 +7180,7 @@
           <a:lstStyle/>
           <a:p>
             <a:pPr algn="ctr"/>
+            <a:endParaRPr/>
           </a:p>
         </p:txBody>
       </p:sp>
@@ -7067,6 +7224,7 @@
           <a:lstStyle/>
           <a:p>
             <a:pPr algn="ctr"/>
+            <a:endParaRPr/>
           </a:p>
         </p:txBody>
       </p:sp>
@@ -7087,7 +7245,7 @@
           <a:noFill/>
         </p:spPr>
         <p:txBody>
-          <a:bodyPr wrap="square" lIns="50800" rIns="50800" tIns="25400" bIns="25400">
+          <a:bodyPr wrap="square" lIns="50800" tIns="25400" rIns="50800" bIns="25400">
             <a:spAutoFit/>
           </a:bodyPr>
           <a:lstStyle/>
@@ -7121,7 +7279,7 @@
           <a:noFill/>
         </p:spPr>
         <p:txBody>
-          <a:bodyPr wrap="square" lIns="50800" rIns="50800" tIns="25400" bIns="25400">
+          <a:bodyPr wrap="square" lIns="50800" tIns="25400" rIns="50800" bIns="25400">
             <a:spAutoFit/>
           </a:bodyPr>
           <a:lstStyle/>
@@ -7228,6 +7386,7 @@
           <a:lstStyle/>
           <a:p>
             <a:pPr algn="ctr"/>
+            <a:endParaRPr/>
           </a:p>
         </p:txBody>
       </p:sp>
@@ -7248,7 +7407,7 @@
           <a:noFill/>
         </p:spPr>
         <p:txBody>
-          <a:bodyPr wrap="square" lIns="50800" rIns="50800" tIns="25400" bIns="25400">
+          <a:bodyPr wrap="square" lIns="50800" tIns="25400" rIns="50800" bIns="25400">
             <a:spAutoFit/>
           </a:bodyPr>
           <a:lstStyle/>
@@ -7282,7 +7441,7 @@
           <a:noFill/>
         </p:spPr>
         <p:txBody>
-          <a:bodyPr wrap="square" lIns="50800" rIns="50800" tIns="25400" bIns="25400">
+          <a:bodyPr wrap="square" lIns="50800" tIns="25400" rIns="50800" bIns="25400">
             <a:spAutoFit/>
           </a:bodyPr>
           <a:lstStyle/>
@@ -7308,7 +7467,7 @@
 </file>
 
 <file path=ppt/slides/slide6.xml><?xml version="1.0" encoding="utf-8"?>
-<p:sld xmlns:a="http://schemas.openxmlformats.org/drawingml/2006/main" xmlns:p="http://schemas.openxmlformats.org/presentationml/2006/main" xmlns:r="http://schemas.openxmlformats.org/officeDocument/2006/relationships">
+<p:sld xmlns:a="http://schemas.openxmlformats.org/drawingml/2006/main" xmlns:r="http://schemas.openxmlformats.org/officeDocument/2006/relationships" xmlns:p="http://schemas.openxmlformats.org/presentationml/2006/main">
   <p:cSld>
     <p:spTree>
       <p:nvGrpSpPr>
@@ -7316,7 +7475,14 @@
         <p:cNvGrpSpPr/>
         <p:nvPr/>
       </p:nvGrpSpPr>
-      <p:grpSpPr/>
+      <p:grpSpPr>
+        <a:xfrm>
+          <a:off x="0" y="0"/>
+          <a:ext cx="0" cy="0"/>
+          <a:chOff x="0" y="0"/>
+          <a:chExt cx="0" cy="0"/>
+        </a:xfrm>
+      </p:grpSpPr>
       <p:sp>
         <p:nvSpPr>
           <p:cNvPr id="2" name="Rectangle 1"/>
@@ -7357,6 +7523,7 @@
           <a:lstStyle/>
           <a:p>
             <a:pPr algn="ctr"/>
+            <a:endParaRPr/>
           </a:p>
         </p:txBody>
       </p:sp>
@@ -7400,6 +7567,7 @@
           <a:lstStyle/>
           <a:p>
             <a:pPr algn="ctr"/>
+            <a:endParaRPr/>
           </a:p>
         </p:txBody>
       </p:sp>
@@ -7443,6 +7611,7 @@
           <a:lstStyle/>
           <a:p>
             <a:pPr algn="ctr"/>
+            <a:endParaRPr/>
           </a:p>
         </p:txBody>
       </p:sp>
@@ -7463,7 +7632,7 @@
           <a:noFill/>
         </p:spPr>
         <p:txBody>
-          <a:bodyPr wrap="square" lIns="50800" rIns="50800" tIns="25400" bIns="25400">
+          <a:bodyPr wrap="square" lIns="50800" tIns="25400" rIns="50800" bIns="25400">
             <a:spAutoFit/>
           </a:bodyPr>
           <a:lstStyle/>
@@ -7497,7 +7666,7 @@
           <a:noFill/>
         </p:spPr>
         <p:txBody>
-          <a:bodyPr wrap="square" lIns="50800" rIns="50800" tIns="25400" bIns="25400">
+          <a:bodyPr wrap="square" lIns="50800" tIns="25400" rIns="50800" bIns="25400">
             <a:spAutoFit/>
           </a:bodyPr>
           <a:lstStyle/>
@@ -7602,6 +7771,7 @@
           <a:lstStyle/>
           <a:p>
             <a:pPr algn="ctr"/>
+            <a:endParaRPr/>
           </a:p>
         </p:txBody>
       </p:sp>
@@ -7622,7 +7792,7 @@
           <a:noFill/>
         </p:spPr>
         <p:txBody>
-          <a:bodyPr wrap="square" lIns="50800" rIns="50800" tIns="25400" bIns="25400">
+          <a:bodyPr wrap="square" lIns="50800" tIns="25400" rIns="50800" bIns="25400">
             <a:spAutoFit/>
           </a:bodyPr>
           <a:lstStyle/>
@@ -7648,7 +7818,7 @@
 </file>
 
 <file path=ppt/slides/slide7.xml><?xml version="1.0" encoding="utf-8"?>
-<p:sld xmlns:a="http://schemas.openxmlformats.org/drawingml/2006/main" xmlns:p="http://schemas.openxmlformats.org/presentationml/2006/main" xmlns:r="http://schemas.openxmlformats.org/officeDocument/2006/relationships">
+<p:sld xmlns:a="http://schemas.openxmlformats.org/drawingml/2006/main" xmlns:r="http://schemas.openxmlformats.org/officeDocument/2006/relationships" xmlns:p="http://schemas.openxmlformats.org/presentationml/2006/main">
   <p:cSld>
     <p:spTree>
       <p:nvGrpSpPr>
@@ -7656,7 +7826,14 @@
         <p:cNvGrpSpPr/>
         <p:nvPr/>
       </p:nvGrpSpPr>
-      <p:grpSpPr/>
+      <p:grpSpPr>
+        <a:xfrm>
+          <a:off x="0" y="0"/>
+          <a:ext cx="0" cy="0"/>
+          <a:chOff x="0" y="0"/>
+          <a:chExt cx="0" cy="0"/>
+        </a:xfrm>
+      </p:grpSpPr>
       <p:sp>
         <p:nvSpPr>
           <p:cNvPr id="2" name="Rectangle 1"/>
@@ -7697,6 +7874,7 @@
           <a:lstStyle/>
           <a:p>
             <a:pPr algn="ctr"/>
+            <a:endParaRPr/>
           </a:p>
         </p:txBody>
       </p:sp>
@@ -7740,6 +7918,7 @@
           <a:lstStyle/>
           <a:p>
             <a:pPr algn="ctr"/>
+            <a:endParaRPr/>
           </a:p>
         </p:txBody>
       </p:sp>
@@ -7783,6 +7962,7 @@
           <a:lstStyle/>
           <a:p>
             <a:pPr algn="ctr"/>
+            <a:endParaRPr/>
           </a:p>
         </p:txBody>
       </p:sp>
@@ -7803,7 +7983,7 @@
           <a:noFill/>
         </p:spPr>
         <p:txBody>
-          <a:bodyPr wrap="square" lIns="50800" rIns="50800" tIns="25400" bIns="25400">
+          <a:bodyPr wrap="square" lIns="50800" tIns="25400" rIns="50800" bIns="25400">
             <a:spAutoFit/>
           </a:bodyPr>
           <a:lstStyle/>
@@ -7837,7 +8017,7 @@
           <a:noFill/>
         </p:spPr>
         <p:txBody>
-          <a:bodyPr wrap="square" lIns="50800" rIns="50800" tIns="25400" bIns="25400">
+          <a:bodyPr wrap="square" lIns="50800" tIns="25400" rIns="50800" bIns="25400">
             <a:spAutoFit/>
           </a:bodyPr>
           <a:lstStyle/>
@@ -7896,6 +8076,7 @@
           <a:lstStyle/>
           <a:p>
             <a:pPr algn="ctr"/>
+            <a:endParaRPr/>
           </a:p>
         </p:txBody>
       </p:sp>
@@ -7916,20 +8097,13 @@
           <a:noFill/>
         </p:spPr>
         <p:txBody>
-          <a:bodyPr wrap="square" lIns="50800" rIns="50800" tIns="25400" bIns="25400">
+          <a:bodyPr wrap="square" lIns="50800" tIns="25400" rIns="50800" bIns="25400">
             <a:spAutoFit/>
           </a:bodyPr>
           <a:lstStyle/>
           <a:p>
             <a:pPr algn="ctr"/>
-            <a:r>
-              <a:rPr sz="1000" b="1" i="0">
-                <a:solidFill>
-                  <a:srgbClr val="FFFFFF"/>
-                </a:solidFill>
-              </a:rPr>
-              <a:t/>
-            </a:r>
+            <a:endParaRPr/>
           </a:p>
         </p:txBody>
       </p:sp>
@@ -7975,6 +8149,7 @@
           <a:lstStyle/>
           <a:p>
             <a:pPr algn="ctr"/>
+            <a:endParaRPr/>
           </a:p>
         </p:txBody>
       </p:sp>
@@ -7995,7 +8170,7 @@
           <a:noFill/>
         </p:spPr>
         <p:txBody>
-          <a:bodyPr wrap="square" lIns="50800" rIns="50800" tIns="25400" bIns="25400">
+          <a:bodyPr wrap="square" lIns="50800" tIns="25400" rIns="50800" bIns="25400">
             <a:spAutoFit/>
           </a:bodyPr>
           <a:lstStyle/>
@@ -8054,6 +8229,7 @@
           <a:lstStyle/>
           <a:p>
             <a:pPr algn="ctr"/>
+            <a:endParaRPr/>
           </a:p>
         </p:txBody>
       </p:sp>
@@ -8074,7 +8250,7 @@
           <a:noFill/>
         </p:spPr>
         <p:txBody>
-          <a:bodyPr wrap="square" lIns="50800" rIns="50800" tIns="25400" bIns="25400">
+          <a:bodyPr wrap="square" lIns="50800" tIns="25400" rIns="50800" bIns="25400">
             <a:spAutoFit/>
           </a:bodyPr>
           <a:lstStyle/>
@@ -8133,6 +8309,7 @@
           <a:lstStyle/>
           <a:p>
             <a:pPr algn="ctr"/>
+            <a:endParaRPr/>
           </a:p>
         </p:txBody>
       </p:sp>
@@ -8153,7 +8330,7 @@
           <a:noFill/>
         </p:spPr>
         <p:txBody>
-          <a:bodyPr wrap="square" lIns="50800" rIns="50800" tIns="25400" bIns="25400">
+          <a:bodyPr wrap="square" lIns="50800" tIns="25400" rIns="50800" bIns="25400">
             <a:spAutoFit/>
           </a:bodyPr>
           <a:lstStyle/>
@@ -8212,6 +8389,7 @@
           <a:lstStyle/>
           <a:p>
             <a:pPr algn="ctr"/>
+            <a:endParaRPr/>
           </a:p>
         </p:txBody>
       </p:sp>
@@ -8232,7 +8410,7 @@
           <a:noFill/>
         </p:spPr>
         <p:txBody>
-          <a:bodyPr wrap="square" lIns="50800" rIns="50800" tIns="25400" bIns="25400">
+          <a:bodyPr wrap="square" lIns="50800" tIns="25400" rIns="50800" bIns="25400">
             <a:spAutoFit/>
           </a:bodyPr>
           <a:lstStyle/>
@@ -8291,6 +8469,7 @@
           <a:lstStyle/>
           <a:p>
             <a:pPr algn="ctr"/>
+            <a:endParaRPr/>
           </a:p>
         </p:txBody>
       </p:sp>
@@ -8311,7 +8490,7 @@
           <a:noFill/>
         </p:spPr>
         <p:txBody>
-          <a:bodyPr wrap="square" lIns="50800" rIns="50800" tIns="25400" bIns="25400">
+          <a:bodyPr wrap="square" lIns="50800" tIns="25400" rIns="50800" bIns="25400">
             <a:spAutoFit/>
           </a:bodyPr>
           <a:lstStyle/>
@@ -8370,6 +8549,7 @@
           <a:lstStyle/>
           <a:p>
             <a:pPr algn="ctr"/>
+            <a:endParaRPr/>
           </a:p>
         </p:txBody>
       </p:sp>
@@ -8390,7 +8570,7 @@
           <a:noFill/>
         </p:spPr>
         <p:txBody>
-          <a:bodyPr wrap="square" lIns="50800" rIns="50800" tIns="25400" bIns="25400">
+          <a:bodyPr wrap="square" lIns="50800" tIns="25400" rIns="50800" bIns="25400">
             <a:spAutoFit/>
           </a:bodyPr>
           <a:lstStyle/>
@@ -8449,6 +8629,7 @@
           <a:lstStyle/>
           <a:p>
             <a:pPr algn="ctr"/>
+            <a:endParaRPr/>
           </a:p>
         </p:txBody>
       </p:sp>
@@ -8469,7 +8650,7 @@
           <a:noFill/>
         </p:spPr>
         <p:txBody>
-          <a:bodyPr wrap="square" lIns="50800" rIns="50800" tIns="25400" bIns="25400">
+          <a:bodyPr wrap="square" lIns="50800" tIns="25400" rIns="50800" bIns="25400">
             <a:spAutoFit/>
           </a:bodyPr>
           <a:lstStyle/>
@@ -8528,6 +8709,7 @@
           <a:lstStyle/>
           <a:p>
             <a:pPr algn="ctr"/>
+            <a:endParaRPr/>
           </a:p>
         </p:txBody>
       </p:sp>
@@ -8548,7 +8730,7 @@
           <a:noFill/>
         </p:spPr>
         <p:txBody>
-          <a:bodyPr wrap="square" lIns="50800" rIns="50800" tIns="25400" bIns="25400">
+          <a:bodyPr wrap="square" lIns="50800" tIns="25400" rIns="50800" bIns="25400">
             <a:spAutoFit/>
           </a:bodyPr>
           <a:lstStyle/>
@@ -8618,6 +8800,7 @@
           <a:lstStyle/>
           <a:p>
             <a:pPr algn="ctr"/>
+            <a:endParaRPr/>
           </a:p>
         </p:txBody>
       </p:sp>
@@ -8638,7 +8821,7 @@
           <a:noFill/>
         </p:spPr>
         <p:txBody>
-          <a:bodyPr wrap="square" lIns="50800" rIns="50800" tIns="25400" bIns="25400">
+          <a:bodyPr wrap="square" lIns="50800" tIns="25400" rIns="50800" bIns="25400">
             <a:spAutoFit/>
           </a:bodyPr>
           <a:lstStyle/>
@@ -8708,6 +8891,7 @@
           <a:lstStyle/>
           <a:p>
             <a:pPr algn="ctr"/>
+            <a:endParaRPr/>
           </a:p>
         </p:txBody>
       </p:sp>
@@ -8728,7 +8912,7 @@
           <a:noFill/>
         </p:spPr>
         <p:txBody>
-          <a:bodyPr wrap="square" lIns="50800" rIns="50800" tIns="25400" bIns="25400">
+          <a:bodyPr wrap="square" lIns="50800" tIns="25400" rIns="50800" bIns="25400">
             <a:spAutoFit/>
           </a:bodyPr>
           <a:lstStyle/>
@@ -8798,6 +8982,7 @@
           <a:lstStyle/>
           <a:p>
             <a:pPr algn="ctr"/>
+            <a:endParaRPr/>
           </a:p>
         </p:txBody>
       </p:sp>
@@ -8818,7 +9003,7 @@
           <a:noFill/>
         </p:spPr>
         <p:txBody>
-          <a:bodyPr wrap="square" lIns="50800" rIns="50800" tIns="25400" bIns="25400">
+          <a:bodyPr wrap="square" lIns="50800" tIns="25400" rIns="50800" bIns="25400">
             <a:spAutoFit/>
           </a:bodyPr>
           <a:lstStyle/>
@@ -8888,6 +9073,7 @@
           <a:lstStyle/>
           <a:p>
             <a:pPr algn="ctr"/>
+            <a:endParaRPr/>
           </a:p>
         </p:txBody>
       </p:sp>
@@ -8908,7 +9094,7 @@
           <a:noFill/>
         </p:spPr>
         <p:txBody>
-          <a:bodyPr wrap="square" lIns="50800" rIns="50800" tIns="25400" bIns="25400">
+          <a:bodyPr wrap="square" lIns="50800" tIns="25400" rIns="50800" bIns="25400">
             <a:spAutoFit/>
           </a:bodyPr>
           <a:lstStyle/>
@@ -8967,6 +9153,7 @@
           <a:lstStyle/>
           <a:p>
             <a:pPr algn="ctr"/>
+            <a:endParaRPr/>
           </a:p>
         </p:txBody>
       </p:sp>
@@ -8987,7 +9174,7 @@
           <a:noFill/>
         </p:spPr>
         <p:txBody>
-          <a:bodyPr wrap="square" lIns="50800" rIns="50800" tIns="25400" bIns="25400">
+          <a:bodyPr wrap="square" lIns="50800" tIns="25400" rIns="50800" bIns="25400">
             <a:spAutoFit/>
           </a:bodyPr>
           <a:lstStyle/>
@@ -9046,6 +9233,7 @@
           <a:lstStyle/>
           <a:p>
             <a:pPr algn="ctr"/>
+            <a:endParaRPr/>
           </a:p>
         </p:txBody>
       </p:sp>
@@ -9066,7 +9254,7 @@
           <a:noFill/>
         </p:spPr>
         <p:txBody>
-          <a:bodyPr wrap="square" lIns="50800" rIns="50800" tIns="25400" bIns="25400">
+          <a:bodyPr wrap="square" lIns="50800" tIns="25400" rIns="50800" bIns="25400">
             <a:spAutoFit/>
           </a:bodyPr>
           <a:lstStyle/>
@@ -9136,6 +9324,7 @@
           <a:lstStyle/>
           <a:p>
             <a:pPr algn="ctr"/>
+            <a:endParaRPr/>
           </a:p>
         </p:txBody>
       </p:sp>
@@ -9156,7 +9345,7 @@
           <a:noFill/>
         </p:spPr>
         <p:txBody>
-          <a:bodyPr wrap="square" lIns="50800" rIns="50800" tIns="25400" bIns="25400">
+          <a:bodyPr wrap="square" lIns="50800" tIns="25400" rIns="50800" bIns="25400">
             <a:spAutoFit/>
           </a:bodyPr>
           <a:lstStyle/>
@@ -9226,6 +9415,7 @@
           <a:lstStyle/>
           <a:p>
             <a:pPr algn="ctr"/>
+            <a:endParaRPr/>
           </a:p>
         </p:txBody>
       </p:sp>
@@ -9246,7 +9436,7 @@
           <a:noFill/>
         </p:spPr>
         <p:txBody>
-          <a:bodyPr wrap="square" lIns="50800" rIns="50800" tIns="25400" bIns="25400">
+          <a:bodyPr wrap="square" lIns="50800" tIns="25400" rIns="50800" bIns="25400">
             <a:spAutoFit/>
           </a:bodyPr>
           <a:lstStyle/>
@@ -9316,6 +9506,7 @@
           <a:lstStyle/>
           <a:p>
             <a:pPr algn="ctr"/>
+            <a:endParaRPr/>
           </a:p>
         </p:txBody>
       </p:sp>
@@ -9336,7 +9527,7 @@
           <a:noFill/>
         </p:spPr>
         <p:txBody>
-          <a:bodyPr wrap="square" lIns="50800" rIns="50800" tIns="25400" bIns="25400">
+          <a:bodyPr wrap="square" lIns="50800" tIns="25400" rIns="50800" bIns="25400">
             <a:spAutoFit/>
           </a:bodyPr>
           <a:lstStyle/>
@@ -9406,6 +9597,7 @@
           <a:lstStyle/>
           <a:p>
             <a:pPr algn="ctr"/>
+            <a:endParaRPr/>
           </a:p>
         </p:txBody>
       </p:sp>
@@ -9426,7 +9618,7 @@
           <a:noFill/>
         </p:spPr>
         <p:txBody>
-          <a:bodyPr wrap="square" lIns="50800" rIns="50800" tIns="25400" bIns="25400">
+          <a:bodyPr wrap="square" lIns="50800" tIns="25400" rIns="50800" bIns="25400">
             <a:spAutoFit/>
           </a:bodyPr>
           <a:lstStyle/>
@@ -9485,6 +9677,7 @@
           <a:lstStyle/>
           <a:p>
             <a:pPr algn="ctr"/>
+            <a:endParaRPr/>
           </a:p>
         </p:txBody>
       </p:sp>
@@ -9505,7 +9698,7 @@
           <a:noFill/>
         </p:spPr>
         <p:txBody>
-          <a:bodyPr wrap="square" lIns="50800" rIns="50800" tIns="25400" bIns="25400">
+          <a:bodyPr wrap="square" lIns="50800" tIns="25400" rIns="50800" bIns="25400">
             <a:spAutoFit/>
           </a:bodyPr>
           <a:lstStyle/>
@@ -9564,6 +9757,7 @@
           <a:lstStyle/>
           <a:p>
             <a:pPr algn="ctr"/>
+            <a:endParaRPr/>
           </a:p>
         </p:txBody>
       </p:sp>
@@ -9584,7 +9778,7 @@
           <a:noFill/>
         </p:spPr>
         <p:txBody>
-          <a:bodyPr wrap="square" lIns="50800" rIns="50800" tIns="25400" bIns="25400">
+          <a:bodyPr wrap="square" lIns="50800" tIns="25400" rIns="50800" bIns="25400">
             <a:spAutoFit/>
           </a:bodyPr>
           <a:lstStyle/>
@@ -9654,6 +9848,7 @@
           <a:lstStyle/>
           <a:p>
             <a:pPr algn="ctr"/>
+            <a:endParaRPr/>
           </a:p>
         </p:txBody>
       </p:sp>
@@ -9674,7 +9869,7 @@
           <a:noFill/>
         </p:spPr>
         <p:txBody>
-          <a:bodyPr wrap="square" lIns="50800" rIns="50800" tIns="25400" bIns="25400">
+          <a:bodyPr wrap="square" lIns="50800" tIns="25400" rIns="50800" bIns="25400">
             <a:spAutoFit/>
           </a:bodyPr>
           <a:lstStyle/>
@@ -9744,6 +9939,7 @@
           <a:lstStyle/>
           <a:p>
             <a:pPr algn="ctr"/>
+            <a:endParaRPr/>
           </a:p>
         </p:txBody>
       </p:sp>
@@ -9764,7 +9960,7 @@
           <a:noFill/>
         </p:spPr>
         <p:txBody>
-          <a:bodyPr wrap="square" lIns="50800" rIns="50800" tIns="25400" bIns="25400">
+          <a:bodyPr wrap="square" lIns="50800" tIns="25400" rIns="50800" bIns="25400">
             <a:spAutoFit/>
           </a:bodyPr>
           <a:lstStyle/>
@@ -9834,6 +10030,7 @@
           <a:lstStyle/>
           <a:p>
             <a:pPr algn="ctr"/>
+            <a:endParaRPr/>
           </a:p>
         </p:txBody>
       </p:sp>
@@ -9854,7 +10051,7 @@
           <a:noFill/>
         </p:spPr>
         <p:txBody>
-          <a:bodyPr wrap="square" lIns="50800" rIns="50800" tIns="25400" bIns="25400">
+          <a:bodyPr wrap="square" lIns="50800" tIns="25400" rIns="50800" bIns="25400">
             <a:spAutoFit/>
           </a:bodyPr>
           <a:lstStyle/>
@@ -9922,6 +10119,7 @@
           <a:lstStyle/>
           <a:p>
             <a:pPr algn="ctr"/>
+            <a:endParaRPr/>
           </a:p>
         </p:txBody>
       </p:sp>
@@ -9942,7 +10140,7 @@
           <a:noFill/>
         </p:spPr>
         <p:txBody>
-          <a:bodyPr wrap="square" lIns="50800" rIns="50800" tIns="25400" bIns="25400">
+          <a:bodyPr wrap="square" lIns="50800" tIns="25400" rIns="50800" bIns="25400">
             <a:spAutoFit/>
           </a:bodyPr>
           <a:lstStyle/>
@@ -10012,6 +10210,7 @@
           <a:lstStyle/>
           <a:p>
             <a:pPr algn="ctr"/>
+            <a:endParaRPr/>
           </a:p>
         </p:txBody>
       </p:sp>
@@ -10032,7 +10231,7 @@
           <a:noFill/>
         </p:spPr>
         <p:txBody>
-          <a:bodyPr wrap="square" lIns="50800" rIns="50800" tIns="25400" bIns="25400">
+          <a:bodyPr wrap="square" lIns="50800" tIns="25400" rIns="50800" bIns="25400">
             <a:spAutoFit/>
           </a:bodyPr>
           <a:lstStyle/>
@@ -10122,6 +10321,7 @@
           <a:lstStyle/>
           <a:p>
             <a:pPr algn="ctr"/>
+            <a:endParaRPr/>
           </a:p>
         </p:txBody>
       </p:sp>
@@ -10142,7 +10342,7 @@
           <a:noFill/>
         </p:spPr>
         <p:txBody>
-          <a:bodyPr wrap="square" lIns="50800" rIns="50800" tIns="25400" bIns="25400">
+          <a:bodyPr wrap="square" lIns="50800" tIns="25400" rIns="50800" bIns="25400">
             <a:spAutoFit/>
           </a:bodyPr>
           <a:lstStyle/>
@@ -10212,6 +10412,7 @@
           <a:lstStyle/>
           <a:p>
             <a:pPr algn="ctr"/>
+            <a:endParaRPr/>
           </a:p>
         </p:txBody>
       </p:sp>
@@ -10232,7 +10433,7 @@
           <a:noFill/>
         </p:spPr>
         <p:txBody>
-          <a:bodyPr wrap="square" lIns="50800" rIns="50800" tIns="25400" bIns="25400">
+          <a:bodyPr wrap="square" lIns="50800" tIns="25400" rIns="50800" bIns="25400">
             <a:spAutoFit/>
           </a:bodyPr>
           <a:lstStyle/>
@@ -10322,6 +10523,7 @@
           <a:lstStyle/>
           <a:p>
             <a:pPr algn="ctr"/>
+            <a:endParaRPr/>
           </a:p>
         </p:txBody>
       </p:sp>
@@ -10342,7 +10544,7 @@
           <a:noFill/>
         </p:spPr>
         <p:txBody>
-          <a:bodyPr wrap="square" lIns="50800" rIns="50800" tIns="25400" bIns="25400">
+          <a:bodyPr wrap="square" lIns="50800" tIns="25400" rIns="50800" bIns="25400">
             <a:spAutoFit/>
           </a:bodyPr>
           <a:lstStyle/>
@@ -10412,6 +10614,7 @@
           <a:lstStyle/>
           <a:p>
             <a:pPr algn="ctr"/>
+            <a:endParaRPr/>
           </a:p>
         </p:txBody>
       </p:sp>
@@ -10432,7 +10635,7 @@
           <a:noFill/>
         </p:spPr>
         <p:txBody>
-          <a:bodyPr wrap="square" lIns="50800" rIns="50800" tIns="25400" bIns="25400">
+          <a:bodyPr wrap="square" lIns="50800" tIns="25400" rIns="50800" bIns="25400">
             <a:spAutoFit/>
           </a:bodyPr>
           <a:lstStyle/>
@@ -10522,6 +10725,7 @@
           <a:lstStyle/>
           <a:p>
             <a:pPr algn="ctr"/>
+            <a:endParaRPr/>
           </a:p>
         </p:txBody>
       </p:sp>
@@ -10542,7 +10746,7 @@
           <a:noFill/>
         </p:spPr>
         <p:txBody>
-          <a:bodyPr wrap="square" lIns="50800" rIns="50800" tIns="25400" bIns="25400">
+          <a:bodyPr wrap="square" lIns="50800" tIns="25400" rIns="50800" bIns="25400">
             <a:spAutoFit/>
           </a:bodyPr>
           <a:lstStyle/>
@@ -10568,7 +10772,7 @@
 </file>
 
 <file path=ppt/slides/slide8.xml><?xml version="1.0" encoding="utf-8"?>
-<p:sld xmlns:a="http://schemas.openxmlformats.org/drawingml/2006/main" xmlns:p="http://schemas.openxmlformats.org/presentationml/2006/main" xmlns:r="http://schemas.openxmlformats.org/officeDocument/2006/relationships">
+<p:sld xmlns:a="http://schemas.openxmlformats.org/drawingml/2006/main" xmlns:r="http://schemas.openxmlformats.org/officeDocument/2006/relationships" xmlns:p="http://schemas.openxmlformats.org/presentationml/2006/main">
   <p:cSld>
     <p:spTree>
       <p:nvGrpSpPr>
@@ -10576,7 +10780,14 @@
         <p:cNvGrpSpPr/>
         <p:nvPr/>
       </p:nvGrpSpPr>
-      <p:grpSpPr/>
+      <p:grpSpPr>
+        <a:xfrm>
+          <a:off x="0" y="0"/>
+          <a:ext cx="0" cy="0"/>
+          <a:chOff x="0" y="0"/>
+          <a:chExt cx="0" cy="0"/>
+        </a:xfrm>
+      </p:grpSpPr>
       <p:sp>
         <p:nvSpPr>
           <p:cNvPr id="2" name="Rectangle 1"/>
@@ -10617,6 +10828,7 @@
           <a:lstStyle/>
           <a:p>
             <a:pPr algn="ctr"/>
+            <a:endParaRPr/>
           </a:p>
         </p:txBody>
       </p:sp>
@@ -10660,6 +10872,7 @@
           <a:lstStyle/>
           <a:p>
             <a:pPr algn="ctr"/>
+            <a:endParaRPr/>
           </a:p>
         </p:txBody>
       </p:sp>
@@ -10703,6 +10916,7 @@
           <a:lstStyle/>
           <a:p>
             <a:pPr algn="ctr"/>
+            <a:endParaRPr/>
           </a:p>
         </p:txBody>
       </p:sp>
@@ -10723,7 +10937,7 @@
           <a:noFill/>
         </p:spPr>
         <p:txBody>
-          <a:bodyPr wrap="square" lIns="50800" rIns="50800" tIns="25400" bIns="25400">
+          <a:bodyPr wrap="square" lIns="50800" tIns="25400" rIns="50800" bIns="25400">
             <a:spAutoFit/>
           </a:bodyPr>
           <a:lstStyle/>
@@ -10757,7 +10971,7 @@
           <a:noFill/>
         </p:spPr>
         <p:txBody>
-          <a:bodyPr wrap="square" lIns="50800" rIns="50800" tIns="25400" bIns="25400">
+          <a:bodyPr wrap="square" lIns="50800" tIns="25400" rIns="50800" bIns="25400">
             <a:spAutoFit/>
           </a:bodyPr>
           <a:lstStyle/>
@@ -10840,6 +11054,7 @@
           <a:lstStyle/>
           <a:p>
             <a:pPr algn="ctr"/>
+            <a:endParaRPr/>
           </a:p>
         </p:txBody>
       </p:sp>
@@ -10860,7 +11075,7 @@
           <a:noFill/>
         </p:spPr>
         <p:txBody>
-          <a:bodyPr wrap="square" lIns="50800" rIns="50800" tIns="25400" bIns="25400">
+          <a:bodyPr wrap="square" lIns="50800" tIns="25400" rIns="50800" bIns="25400">
             <a:spAutoFit/>
           </a:bodyPr>
           <a:lstStyle/>
